--- a/Case3_Abgabe/Case3_Praesentation.pptx
+++ b/Case3_Abgabe/Case3_Praesentation.pptx
@@ -5,23 +5,23 @@
     <p:sldMasterId id="2147483648" r:id="rId4"/>
   </p:sldMasterIdLst>
   <p:notesMasterIdLst>
-    <p:notesMasterId r:id="rId18"/>
+    <p:notesMasterId r:id="rId19"/>
   </p:notesMasterIdLst>
   <p:sldIdLst>
     <p:sldId id="256" r:id="rId5"/>
     <p:sldId id="257" r:id="rId6"/>
-    <p:sldId id="269" r:id="rId24"/>
-    <p:sldId id="258" r:id="rId7"/>
-    <p:sldId id="259" r:id="rId8"/>
-    <p:sldId id="260" r:id="rId9"/>
-    <p:sldId id="261" r:id="rId10"/>
-    <p:sldId id="262" r:id="rId11"/>
-    <p:sldId id="263" r:id="rId12"/>
-    <p:sldId id="264" r:id="rId13"/>
-    <p:sldId id="265" r:id="rId14"/>
-    <p:sldId id="266" r:id="rId15"/>
-    <p:sldId id="267" r:id="rId16"/>
-    <p:sldId id="268" r:id="rId17"/>
+    <p:sldId id="269" r:id="rId7"/>
+    <p:sldId id="258" r:id="rId8"/>
+    <p:sldId id="259" r:id="rId9"/>
+    <p:sldId id="260" r:id="rId10"/>
+    <p:sldId id="261" r:id="rId11"/>
+    <p:sldId id="262" r:id="rId12"/>
+    <p:sldId id="263" r:id="rId13"/>
+    <p:sldId id="264" r:id="rId14"/>
+    <p:sldId id="265" r:id="rId15"/>
+    <p:sldId id="266" r:id="rId16"/>
+    <p:sldId id="267" r:id="rId17"/>
+    <p:sldId id="268" r:id="rId18"/>
   </p:sldIdLst>
   <p:sldSz cx="9144000" cy="5143500" type="screen16x9"/>
   <p:notesSz cx="5143500" cy="9144000"/>
@@ -1119,7 +1119,7 @@
           <a:p>
             <a:fld id="{F7021451-1387-4CA6-816F-3879F97B5CBC}" type="slidenum">
               <a:rPr lang="en-US"/>
-              <a:t>10</a:t>
+              <a:t>11</a:t>
             </a:fld>
             <a:endParaRPr lang="en-US"/>
           </a:p>
@@ -1523,7 +1523,7 @@
           <a:p>
             <a:fld id="{F7021451-1387-4CA6-816F-3879F97B5CBC}" type="slidenum">
               <a:rPr lang="en-US"/>
-              <a:t>11</a:t>
+              <a:t>12</a:t>
             </a:fld>
             <a:endParaRPr lang="en-US"/>
           </a:p>
@@ -1691,7 +1691,7 @@
           <a:p>
             <a:fld id="{F7021451-1387-4CA6-816F-3879F97B5CBC}" type="slidenum">
               <a:rPr lang="en-US"/>
-              <a:t>12</a:t>
+              <a:t>13</a:t>
             </a:fld>
             <a:endParaRPr lang="en-US"/>
           </a:p>
@@ -1775,7 +1775,7 @@
           <a:p>
             <a:fld id="{F7021451-1387-4CA6-816F-3879F97B5CBC}" type="slidenum">
               <a:rPr lang="en-US"/>
-              <a:t>13</a:t>
+              <a:t>14</a:t>
             </a:fld>
             <a:endParaRPr lang="en-US"/>
           </a:p>
@@ -1997,7 +1997,7 @@
           <a:p>
             <a:fld id="{F7021451-1387-4CA6-816F-3879F97B5CBC}" type="slidenum">
               <a:rPr lang="en-US"/>
-              <a:t>3</a:t>
+              <a:t>4</a:t>
             </a:fld>
             <a:endParaRPr lang="en-US"/>
           </a:p>
@@ -2165,7 +2165,7 @@
           <a:p>
             <a:fld id="{F7021451-1387-4CA6-816F-3879F97B5CBC}" type="slidenum">
               <a:rPr lang="en-US"/>
-              <a:t>4</a:t>
+              <a:t>5</a:t>
             </a:fld>
             <a:endParaRPr lang="en-US"/>
           </a:p>
@@ -2411,7 +2411,7 @@
           <a:p>
             <a:fld id="{F7021451-1387-4CA6-816F-3879F97B5CBC}" type="slidenum">
               <a:rPr lang="en-US"/>
-              <a:t>5</a:t>
+              <a:t>6</a:t>
             </a:fld>
             <a:endParaRPr lang="en-US"/>
           </a:p>
@@ -2667,7 +2667,7 @@
           <a:p>
             <a:fld id="{F7021451-1387-4CA6-816F-3879F97B5CBC}" type="slidenum">
               <a:rPr lang="en-US"/>
-              <a:t>6</a:t>
+              <a:t>7</a:t>
             </a:fld>
             <a:endParaRPr lang="en-US"/>
           </a:p>
@@ -3115,7 +3115,7 @@
           <a:p>
             <a:fld id="{F7021451-1387-4CA6-816F-3879F97B5CBC}" type="slidenum">
               <a:rPr lang="en-US"/>
-              <a:t>7</a:t>
+              <a:t>8</a:t>
             </a:fld>
             <a:endParaRPr lang="en-US"/>
           </a:p>
@@ -3347,7 +3347,7 @@
           <a:p>
             <a:fld id="{F7021451-1387-4CA6-816F-3879F97B5CBC}" type="slidenum">
               <a:rPr lang="en-US"/>
-              <a:t>8</a:t>
+              <a:t>9</a:t>
             </a:fld>
             <a:endParaRPr lang="en-US"/>
           </a:p>
@@ -3739,7 +3739,7 @@
           <a:p>
             <a:fld id="{F7021451-1387-4CA6-816F-3879F97B5CBC}" type="slidenum">
               <a:rPr lang="en-US"/>
-              <a:t>9</a:t>
+              <a:t>10</a:t>
             </a:fld>
             <a:endParaRPr lang="en-US"/>
           </a:p>
@@ -4368,6 +4368,869 @@
 
 <file path=ppt/slides/slide10.xml><?xml version="1.0" encoding="utf-8"?>
 <p:sld xmlns:a="http://schemas.openxmlformats.org/drawingml/2006/main" xmlns:r="http://schemas.openxmlformats.org/officeDocument/2006/relationships" xmlns:p="http://schemas.openxmlformats.org/presentationml/2006/main">
+  <p:cSld name="Slide 9">
+    <p:bg>
+      <p:bgPr>
+        <a:solidFill>
+          <a:srgbClr val="F8FAFC"/>
+        </a:solidFill>
+        <a:effectLst/>
+      </p:bgPr>
+    </p:bg>
+    <p:spTree>
+      <p:nvGrpSpPr>
+        <p:cNvPr id="1" name=""/>
+        <p:cNvGrpSpPr/>
+        <p:nvPr/>
+      </p:nvGrpSpPr>
+      <p:grpSpPr>
+        <a:xfrm>
+          <a:off x="0" y="0"/>
+          <a:ext cx="0" cy="0"/>
+          <a:chOff x="0" y="0"/>
+          <a:chExt cx="0" cy="0"/>
+        </a:xfrm>
+      </p:grpSpPr>
+      <p:sp>
+        <p:nvSpPr>
+          <p:cNvPr id="2" name="Text 0"/>
+          <p:cNvSpPr/>
+          <p:nvPr/>
+        </p:nvSpPr>
+        <p:spPr>
+          <a:xfrm>
+            <a:off x="731520" y="274320"/>
+            <a:ext cx="7680960" cy="548640"/>
+          </a:xfrm>
+          <a:prstGeom prst="rect">
+            <a:avLst/>
+          </a:prstGeom>
+          <a:noFill/>
+          <a:ln/>
+        </p:spPr>
+        <p:txBody>
+          <a:bodyPr wrap="square" lIns="0" tIns="0" rIns="0" bIns="0" rtlCol="0" anchor="ctr"/>
+          <a:lstStyle/>
+          <a:p>
+            <a:pPr marL="0" indent="0">
+              <a:buNone/>
+            </a:pPr>
+            <a:r>
+              <a:rPr lang="en-US" sz="2600" b="1" dirty="0">
+                <a:solidFill>
+                  <a:srgbClr val="0F1B2D"/>
+                </a:solidFill>
+                <a:latin typeface="Georgia" pitchFamily="34" charset="0"/>
+                <a:ea typeface="Georgia" pitchFamily="34" charset="-122"/>
+                <a:cs typeface="Georgia" pitchFamily="34" charset="-120"/>
+              </a:rPr>
+              <a:t>Code: MessageReceiver.java</a:t>
+            </a:r>
+            <a:endParaRPr lang="en-US" sz="2600" dirty="0"/>
+          </a:p>
+        </p:txBody>
+      </p:sp>
+      <p:sp>
+        <p:nvSpPr>
+          <p:cNvPr id="3" name="Shape 1"/>
+          <p:cNvSpPr/>
+          <p:nvPr/>
+        </p:nvSpPr>
+        <p:spPr>
+          <a:xfrm>
+            <a:off x="457200" y="914400"/>
+            <a:ext cx="5303520" cy="3931920"/>
+          </a:xfrm>
+          <a:prstGeom prst="rect">
+            <a:avLst/>
+          </a:prstGeom>
+          <a:solidFill>
+            <a:srgbClr val="1E293B"/>
+          </a:solidFill>
+          <a:ln/>
+          <a:effectLst>
+            <a:outerShdw blurRad="50800" dist="25400" dir="8100000" algn="bl" rotWithShape="0">
+              <a:srgbClr val="000000">
+                <a:alpha val="10000"/>
+              </a:srgbClr>
+            </a:outerShdw>
+          </a:effectLst>
+        </p:spPr>
+        <p:txBody>
+          <a:bodyPr/>
+          <a:lstStyle/>
+          <a:p>
+            <a:endParaRPr lang="de-DE"/>
+          </a:p>
+        </p:txBody>
+      </p:sp>
+      <p:sp>
+        <p:nvSpPr>
+          <p:cNvPr id="4" name="Text 2"/>
+          <p:cNvSpPr/>
+          <p:nvPr/>
+        </p:nvSpPr>
+        <p:spPr>
+          <a:xfrm>
+            <a:off x="640080" y="1051560"/>
+            <a:ext cx="4937760" cy="3657600"/>
+          </a:xfrm>
+          <a:prstGeom prst="rect">
+            <a:avLst/>
+          </a:prstGeom>
+          <a:noFill/>
+          <a:ln/>
+        </p:spPr>
+        <p:txBody>
+          <a:bodyPr wrap="square" rtlCol="0" anchor="t"/>
+          <a:lstStyle/>
+          <a:p>
+            <a:pPr marL="0" indent="0">
+              <a:buNone/>
+            </a:pPr>
+            <a:r>
+              <a:rPr lang="en-US" sz="1000" dirty="0">
+                <a:solidFill>
+                  <a:srgbClr val="93C5FD"/>
+                </a:solidFill>
+                <a:latin typeface="Consolas" pitchFamily="34" charset="0"/>
+                <a:ea typeface="Consolas" pitchFamily="34" charset="-122"/>
+                <a:cs typeface="Consolas" pitchFamily="34" charset="-120"/>
+              </a:rPr>
+              <a:t>@JmsListener(destination = "dispo.jobs.new",</a:t>
+            </a:r>
+            <a:endParaRPr lang="en-US" sz="1000" dirty="0"/>
+          </a:p>
+          <a:p>
+            <a:pPr marL="0" indent="0">
+              <a:buNone/>
+            </a:pPr>
+            <a:r>
+              <a:rPr lang="en-US" sz="1000" dirty="0">
+                <a:solidFill>
+                  <a:srgbClr val="93C5FD"/>
+                </a:solidFill>
+                <a:latin typeface="Consolas" pitchFamily="34" charset="0"/>
+                <a:ea typeface="Consolas" pitchFamily="34" charset="-122"/>
+                <a:cs typeface="Consolas" pitchFamily="34" charset="-120"/>
+              </a:rPr>
+              <a:t>             containerFactory = "myFactory")</a:t>
+            </a:r>
+            <a:endParaRPr lang="en-US" sz="1000" dirty="0"/>
+          </a:p>
+          <a:p>
+            <a:pPr marL="0" indent="0">
+              <a:buNone/>
+            </a:pPr>
+            <a:r>
+              <a:rPr lang="en-US" sz="1000" dirty="0">
+                <a:solidFill>
+                  <a:srgbClr val="E2E8F0"/>
+                </a:solidFill>
+                <a:latin typeface="Consolas" pitchFamily="34" charset="0"/>
+                <a:ea typeface="Consolas" pitchFamily="34" charset="-122"/>
+                <a:cs typeface="Consolas" pitchFamily="34" charset="-120"/>
+              </a:rPr>
+              <a:t>public void receiveNewJob(JobMessage job) {</a:t>
+            </a:r>
+            <a:endParaRPr lang="en-US" sz="1000" dirty="0"/>
+          </a:p>
+          <a:p>
+            <a:pPr marL="0" indent="0">
+              <a:buNone/>
+            </a:pPr>
+            <a:r>
+              <a:rPr lang="en-US" sz="1000" dirty="0">
+                <a:solidFill>
+                  <a:srgbClr val="E2E8F0"/>
+                </a:solidFill>
+                <a:latin typeface="Consolas" pitchFamily="34" charset="0"/>
+                <a:ea typeface="Consolas" pitchFamily="34" charset="-122"/>
+                <a:cs typeface="Consolas" pitchFamily="34" charset="-120"/>
+              </a:rPr>
+              <a:t>    ui.addJobToList(job);</a:t>
+            </a:r>
+            <a:endParaRPr lang="en-US" sz="1000" dirty="0"/>
+          </a:p>
+          <a:p>
+            <a:pPr marL="0" indent="0">
+              <a:buNone/>
+            </a:pPr>
+            <a:r>
+              <a:rPr lang="en-US" sz="1000" dirty="0">
+                <a:solidFill>
+                  <a:srgbClr val="E2E8F0"/>
+                </a:solidFill>
+                <a:latin typeface="Consolas" pitchFamily="34" charset="0"/>
+                <a:ea typeface="Consolas" pitchFamily="34" charset="-122"/>
+                <a:cs typeface="Consolas" pitchFamily="34" charset="-120"/>
+              </a:rPr>
+              <a:t>}</a:t>
+            </a:r>
+            <a:endParaRPr lang="en-US" sz="1000" dirty="0"/>
+          </a:p>
+          <a:p>
+            <a:pPr marL="0" indent="0">
+              <a:buNone/>
+            </a:pPr>
+            <a:endParaRPr lang="en-US" sz="1000" dirty="0"/>
+          </a:p>
+          <a:p>
+            <a:pPr marL="0" indent="0">
+              <a:buNone/>
+            </a:pPr>
+            <a:r>
+              <a:rPr lang="en-US" sz="1000" dirty="0">
+                <a:solidFill>
+                  <a:srgbClr val="93C5FD"/>
+                </a:solidFill>
+                <a:latin typeface="Consolas" pitchFamily="34" charset="0"/>
+                <a:ea typeface="Consolas" pitchFamily="34" charset="-122"/>
+                <a:cs typeface="Consolas" pitchFamily="34" charset="-120"/>
+              </a:rPr>
+              <a:t>@JmsListener(destination = "dispo.jobs.assignments",</a:t>
+            </a:r>
+            <a:endParaRPr lang="en-US" sz="1000" dirty="0"/>
+          </a:p>
+          <a:p>
+            <a:pPr marL="0" indent="0">
+              <a:buNone/>
+            </a:pPr>
+            <a:r>
+              <a:rPr lang="en-US" sz="1000" dirty="0">
+                <a:solidFill>
+                  <a:srgbClr val="93C5FD"/>
+                </a:solidFill>
+                <a:latin typeface="Consolas" pitchFamily="34" charset="0"/>
+                <a:ea typeface="Consolas" pitchFamily="34" charset="-122"/>
+                <a:cs typeface="Consolas" pitchFamily="34" charset="-120"/>
+              </a:rPr>
+              <a:t>             containerFactory = "myFactory")</a:t>
+            </a:r>
+            <a:endParaRPr lang="en-US" sz="1000" dirty="0"/>
+          </a:p>
+          <a:p>
+            <a:pPr marL="0" indent="0">
+              <a:buNone/>
+            </a:pPr>
+            <a:r>
+              <a:rPr lang="en-US" sz="1000" dirty="0">
+                <a:solidFill>
+                  <a:srgbClr val="E2E8F0"/>
+                </a:solidFill>
+                <a:latin typeface="Consolas" pitchFamily="34" charset="0"/>
+                <a:ea typeface="Consolas" pitchFamily="34" charset="-122"/>
+                <a:cs typeface="Consolas" pitchFamily="34" charset="-120"/>
+              </a:rPr>
+              <a:t>public void receiveAssignment(</a:t>
+            </a:r>
+            <a:endParaRPr lang="en-US" sz="1000" dirty="0"/>
+          </a:p>
+          <a:p>
+            <a:pPr marL="0" indent="0">
+              <a:buNone/>
+            </a:pPr>
+            <a:r>
+              <a:rPr lang="en-US" sz="1000" dirty="0">
+                <a:solidFill>
+                  <a:srgbClr val="E2E8F0"/>
+                </a:solidFill>
+                <a:latin typeface="Consolas" pitchFamily="34" charset="0"/>
+                <a:ea typeface="Consolas" pitchFamily="34" charset="-122"/>
+                <a:cs typeface="Consolas" pitchFamily="34" charset="-120"/>
+              </a:rPr>
+              <a:t>        JobAssignmentMessage assignment) {</a:t>
+            </a:r>
+            <a:endParaRPr lang="en-US" sz="1000" dirty="0"/>
+          </a:p>
+          <a:p>
+            <a:pPr marL="0" indent="0">
+              <a:buNone/>
+            </a:pPr>
+            <a:r>
+              <a:rPr lang="en-US" sz="1000" dirty="0">
+                <a:solidFill>
+                  <a:srgbClr val="E2E8F0"/>
+                </a:solidFill>
+                <a:latin typeface="Consolas" pitchFamily="34" charset="0"/>
+                <a:ea typeface="Consolas" pitchFamily="34" charset="-122"/>
+                <a:cs typeface="Consolas" pitchFamily="34" charset="-120"/>
+              </a:rPr>
+              <a:t>    ui.assignJob(assignment);</a:t>
+            </a:r>
+            <a:endParaRPr lang="en-US" sz="1000" dirty="0"/>
+          </a:p>
+          <a:p>
+            <a:pPr marL="0" indent="0">
+              <a:buNone/>
+            </a:pPr>
+            <a:r>
+              <a:rPr lang="en-US" sz="1000" dirty="0">
+                <a:solidFill>
+                  <a:srgbClr val="E2E8F0"/>
+                </a:solidFill>
+                <a:latin typeface="Consolas" pitchFamily="34" charset="0"/>
+                <a:ea typeface="Consolas" pitchFamily="34" charset="-122"/>
+                <a:cs typeface="Consolas" pitchFamily="34" charset="-120"/>
+              </a:rPr>
+              <a:t>}</a:t>
+            </a:r>
+            <a:endParaRPr lang="en-US" sz="1000" dirty="0"/>
+          </a:p>
+          <a:p>
+            <a:pPr marL="0" indent="0">
+              <a:buNone/>
+            </a:pPr>
+            <a:endParaRPr lang="en-US" sz="1000" dirty="0"/>
+          </a:p>
+          <a:p>
+            <a:pPr marL="0" indent="0">
+              <a:buNone/>
+            </a:pPr>
+            <a:r>
+              <a:rPr lang="en-US" sz="1000" i="1" dirty="0">
+                <a:solidFill>
+                  <a:srgbClr val="6B7280"/>
+                </a:solidFill>
+                <a:latin typeface="Consolas" pitchFamily="34" charset="0"/>
+                <a:ea typeface="Consolas" pitchFamily="34" charset="-122"/>
+                <a:cs typeface="Consolas" pitchFamily="34" charset="-120"/>
+              </a:rPr>
+              <a:t>// Factory: Topic-Modus aktivieren</a:t>
+            </a:r>
+            <a:endParaRPr lang="en-US" sz="1000" dirty="0"/>
+          </a:p>
+          <a:p>
+            <a:pPr marL="0" indent="0">
+              <a:buNone/>
+            </a:pPr>
+            <a:r>
+              <a:rPr lang="en-US" sz="1000" b="1" dirty="0">
+                <a:solidFill>
+                  <a:srgbClr val="FCD34D"/>
+                </a:solidFill>
+                <a:latin typeface="Consolas" pitchFamily="34" charset="0"/>
+                <a:ea typeface="Consolas" pitchFamily="34" charset="-122"/>
+                <a:cs typeface="Consolas" pitchFamily="34" charset="-120"/>
+              </a:rPr>
+              <a:t>factory.setPubSubDomain(true);</a:t>
+            </a:r>
+            <a:endParaRPr lang="en-US" sz="1000" dirty="0"/>
+          </a:p>
+          <a:p>
+            <a:pPr marL="0" indent="0">
+              <a:buNone/>
+            </a:pPr>
+            <a:r>
+              <a:rPr lang="en-US" sz="1000" dirty="0">
+                <a:solidFill>
+                  <a:srgbClr val="E2E8F0"/>
+                </a:solidFill>
+                <a:latin typeface="Consolas" pitchFamily="34" charset="0"/>
+                <a:ea typeface="Consolas" pitchFamily="34" charset="-122"/>
+                <a:cs typeface="Consolas" pitchFamily="34" charset="-120"/>
+              </a:rPr>
+              <a:t>factory.setMessageConverter(</a:t>
+            </a:r>
+            <a:endParaRPr lang="en-US" sz="1000" dirty="0"/>
+          </a:p>
+          <a:p>
+            <a:pPr marL="0" indent="0">
+              <a:buNone/>
+            </a:pPr>
+            <a:r>
+              <a:rPr lang="en-US" sz="1000" dirty="0">
+                <a:solidFill>
+                  <a:srgbClr val="E2E8F0"/>
+                </a:solidFill>
+                <a:latin typeface="Consolas" pitchFamily="34" charset="0"/>
+                <a:ea typeface="Consolas" pitchFamily="34" charset="-122"/>
+                <a:cs typeface="Consolas" pitchFamily="34" charset="-120"/>
+              </a:rPr>
+              <a:t>    jacksonJmsMessageConverter());</a:t>
+            </a:r>
+            <a:endParaRPr lang="en-US" sz="1000" dirty="0"/>
+          </a:p>
+        </p:txBody>
+      </p:sp>
+      <p:sp>
+        <p:nvSpPr>
+          <p:cNvPr id="5" name="Shape 3"/>
+          <p:cNvSpPr/>
+          <p:nvPr/>
+        </p:nvSpPr>
+        <p:spPr>
+          <a:xfrm>
+            <a:off x="5943600" y="914400"/>
+            <a:ext cx="2834640" cy="960120"/>
+          </a:xfrm>
+          <a:prstGeom prst="rect">
+            <a:avLst/>
+          </a:prstGeom>
+          <a:solidFill>
+            <a:srgbClr val="FFFFFF"/>
+          </a:solidFill>
+          <a:ln/>
+          <a:effectLst>
+            <a:outerShdw blurRad="50800" dist="25400" dir="8100000" algn="bl" rotWithShape="0">
+              <a:srgbClr val="000000">
+                <a:alpha val="10000"/>
+              </a:srgbClr>
+            </a:outerShdw>
+          </a:effectLst>
+        </p:spPr>
+        <p:txBody>
+          <a:bodyPr/>
+          <a:lstStyle/>
+          <a:p>
+            <a:endParaRPr lang="de-DE"/>
+          </a:p>
+        </p:txBody>
+      </p:sp>
+      <p:sp>
+        <p:nvSpPr>
+          <p:cNvPr id="6" name="Shape 4"/>
+          <p:cNvSpPr/>
+          <p:nvPr/>
+        </p:nvSpPr>
+        <p:spPr>
+          <a:xfrm>
+            <a:off x="5943600" y="914400"/>
+            <a:ext cx="54864" cy="960120"/>
+          </a:xfrm>
+          <a:prstGeom prst="rect">
+            <a:avLst/>
+          </a:prstGeom>
+          <a:solidFill>
+            <a:srgbClr val="065A82"/>
+          </a:solidFill>
+          <a:ln/>
+        </p:spPr>
+        <p:txBody>
+          <a:bodyPr/>
+          <a:lstStyle/>
+          <a:p>
+            <a:endParaRPr lang="de-DE"/>
+          </a:p>
+        </p:txBody>
+      </p:sp>
+      <p:sp>
+        <p:nvSpPr>
+          <p:cNvPr id="7" name="Text 5"/>
+          <p:cNvSpPr/>
+          <p:nvPr/>
+        </p:nvSpPr>
+        <p:spPr>
+          <a:xfrm>
+            <a:off x="6172200" y="1005840"/>
+            <a:ext cx="2468880" cy="274320"/>
+          </a:xfrm>
+          <a:prstGeom prst="rect">
+            <a:avLst/>
+          </a:prstGeom>
+          <a:noFill/>
+          <a:ln/>
+        </p:spPr>
+        <p:txBody>
+          <a:bodyPr wrap="square" lIns="0" tIns="0" rIns="0" bIns="0" rtlCol="0" anchor="ctr"/>
+          <a:lstStyle/>
+          <a:p>
+            <a:pPr marL="0" indent="0">
+              <a:buNone/>
+            </a:pPr>
+            <a:r>
+              <a:rPr lang="en-US" sz="1200" b="1" dirty="0">
+                <a:solidFill>
+                  <a:srgbClr val="065A82"/>
+                </a:solidFill>
+                <a:latin typeface="Calibri" pitchFamily="34" charset="0"/>
+                <a:ea typeface="Calibri" pitchFamily="34" charset="-122"/>
+                <a:cs typeface="Calibri" pitchFamily="34" charset="-120"/>
+              </a:rPr>
+              <a:t>Listener 1: Neue Jobs</a:t>
+            </a:r>
+            <a:endParaRPr lang="en-US" sz="1200" dirty="0"/>
+          </a:p>
+        </p:txBody>
+      </p:sp>
+      <p:sp>
+        <p:nvSpPr>
+          <p:cNvPr id="8" name="Text 6"/>
+          <p:cNvSpPr/>
+          <p:nvPr/>
+        </p:nvSpPr>
+        <p:spPr>
+          <a:xfrm>
+            <a:off x="6172200" y="1325880"/>
+            <a:ext cx="2468880" cy="457200"/>
+          </a:xfrm>
+          <a:prstGeom prst="rect">
+            <a:avLst/>
+          </a:prstGeom>
+          <a:noFill/>
+          <a:ln/>
+        </p:spPr>
+        <p:txBody>
+          <a:bodyPr wrap="square" lIns="0" tIns="0" rIns="0" bIns="0" rtlCol="0" anchor="ctr"/>
+          <a:lstStyle/>
+          <a:p>
+            <a:pPr marL="0" indent="0">
+              <a:buNone/>
+            </a:pPr>
+            <a:r>
+              <a:rPr lang="en-US" sz="1050" dirty="0">
+                <a:solidFill>
+                  <a:srgbClr val="64748B"/>
+                </a:solidFill>
+                <a:latin typeface="Calibri" pitchFamily="34" charset="0"/>
+                <a:ea typeface="Calibri" pitchFamily="34" charset="-122"/>
+                <a:cs typeface="Calibri" pitchFamily="34" charset="-120"/>
+              </a:rPr>
+              <a:t>Hört auf Topic dispo.jobs.new</a:t>
+            </a:r>
+            <a:endParaRPr lang="en-US" sz="1050" dirty="0"/>
+          </a:p>
+          <a:p>
+            <a:pPr marL="0" indent="0">
+              <a:buNone/>
+            </a:pPr>
+            <a:r>
+              <a:rPr lang="en-US" sz="1050" dirty="0">
+                <a:solidFill>
+                  <a:srgbClr val="64748B"/>
+                </a:solidFill>
+                <a:latin typeface="Calibri" pitchFamily="34" charset="0"/>
+                <a:ea typeface="Calibri" pitchFamily="34" charset="-122"/>
+                <a:cs typeface="Calibri" pitchFamily="34" charset="-120"/>
+              </a:rPr>
+              <a:t>Alle Clients empfangen eine Kopie</a:t>
+            </a:r>
+            <a:endParaRPr lang="en-US" sz="1050" dirty="0"/>
+          </a:p>
+        </p:txBody>
+      </p:sp>
+      <p:sp>
+        <p:nvSpPr>
+          <p:cNvPr id="9" name="Shape 7"/>
+          <p:cNvSpPr/>
+          <p:nvPr/>
+        </p:nvSpPr>
+        <p:spPr>
+          <a:xfrm>
+            <a:off x="5943600" y="2103120"/>
+            <a:ext cx="2834640" cy="960120"/>
+          </a:xfrm>
+          <a:prstGeom prst="rect">
+            <a:avLst/>
+          </a:prstGeom>
+          <a:solidFill>
+            <a:srgbClr val="FFFFFF"/>
+          </a:solidFill>
+          <a:ln/>
+          <a:effectLst>
+            <a:outerShdw blurRad="50800" dist="25400" dir="8100000" algn="bl" rotWithShape="0">
+              <a:srgbClr val="000000">
+                <a:alpha val="10000"/>
+              </a:srgbClr>
+            </a:outerShdw>
+          </a:effectLst>
+        </p:spPr>
+        <p:txBody>
+          <a:bodyPr/>
+          <a:lstStyle/>
+          <a:p>
+            <a:endParaRPr lang="de-DE"/>
+          </a:p>
+        </p:txBody>
+      </p:sp>
+      <p:sp>
+        <p:nvSpPr>
+          <p:cNvPr id="10" name="Shape 8"/>
+          <p:cNvSpPr/>
+          <p:nvPr/>
+        </p:nvSpPr>
+        <p:spPr>
+          <a:xfrm>
+            <a:off x="5943600" y="2103120"/>
+            <a:ext cx="54864" cy="960120"/>
+          </a:xfrm>
+          <a:prstGeom prst="rect">
+            <a:avLst/>
+          </a:prstGeom>
+          <a:solidFill>
+            <a:srgbClr val="1C7293"/>
+          </a:solidFill>
+          <a:ln/>
+        </p:spPr>
+        <p:txBody>
+          <a:bodyPr/>
+          <a:lstStyle/>
+          <a:p>
+            <a:endParaRPr lang="de-DE"/>
+          </a:p>
+        </p:txBody>
+      </p:sp>
+      <p:sp>
+        <p:nvSpPr>
+          <p:cNvPr id="11" name="Text 9"/>
+          <p:cNvSpPr/>
+          <p:nvPr/>
+        </p:nvSpPr>
+        <p:spPr>
+          <a:xfrm>
+            <a:off x="6172200" y="2194560"/>
+            <a:ext cx="2468880" cy="274320"/>
+          </a:xfrm>
+          <a:prstGeom prst="rect">
+            <a:avLst/>
+          </a:prstGeom>
+          <a:noFill/>
+          <a:ln/>
+        </p:spPr>
+        <p:txBody>
+          <a:bodyPr wrap="square" lIns="0" tIns="0" rIns="0" bIns="0" rtlCol="0" anchor="ctr"/>
+          <a:lstStyle/>
+          <a:p>
+            <a:pPr marL="0" indent="0">
+              <a:buNone/>
+            </a:pPr>
+            <a:r>
+              <a:rPr lang="en-US" sz="1200" b="1" dirty="0">
+                <a:solidFill>
+                  <a:srgbClr val="1C7293"/>
+                </a:solidFill>
+                <a:latin typeface="Calibri" pitchFamily="34" charset="0"/>
+                <a:ea typeface="Calibri" pitchFamily="34" charset="-122"/>
+                <a:cs typeface="Calibri" pitchFamily="34" charset="-120"/>
+              </a:rPr>
+              <a:t>Listener 2: Zuweisungen</a:t>
+            </a:r>
+            <a:endParaRPr lang="en-US" sz="1200" dirty="0"/>
+          </a:p>
+        </p:txBody>
+      </p:sp>
+      <p:sp>
+        <p:nvSpPr>
+          <p:cNvPr id="12" name="Text 10"/>
+          <p:cNvSpPr/>
+          <p:nvPr/>
+        </p:nvSpPr>
+        <p:spPr>
+          <a:xfrm>
+            <a:off x="6172200" y="2514600"/>
+            <a:ext cx="2468880" cy="457200"/>
+          </a:xfrm>
+          <a:prstGeom prst="rect">
+            <a:avLst/>
+          </a:prstGeom>
+          <a:noFill/>
+          <a:ln/>
+        </p:spPr>
+        <p:txBody>
+          <a:bodyPr wrap="square" lIns="0" tIns="0" rIns="0" bIns="0" rtlCol="0" anchor="ctr"/>
+          <a:lstStyle/>
+          <a:p>
+            <a:pPr marL="0" indent="0">
+              <a:buNone/>
+            </a:pPr>
+            <a:r>
+              <a:rPr lang="en-US" sz="1050" dirty="0">
+                <a:solidFill>
+                  <a:srgbClr val="64748B"/>
+                </a:solidFill>
+                <a:latin typeface="Calibri" pitchFamily="34" charset="0"/>
+                <a:ea typeface="Calibri" pitchFamily="34" charset="-122"/>
+                <a:cs typeface="Calibri" pitchFamily="34" charset="-120"/>
+              </a:rPr>
+              <a:t>Hört auf Topic dispo.jobs.assignments</a:t>
+            </a:r>
+            <a:endParaRPr lang="en-US" sz="1050" dirty="0"/>
+          </a:p>
+          <a:p>
+            <a:pPr marL="0" indent="0">
+              <a:buNone/>
+            </a:pPr>
+            <a:r>
+              <a:rPr lang="en-US" sz="1050" dirty="0">
+                <a:solidFill>
+                  <a:srgbClr val="64748B"/>
+                </a:solidFill>
+                <a:latin typeface="Calibri" pitchFamily="34" charset="0"/>
+                <a:ea typeface="Calibri" pitchFamily="34" charset="-122"/>
+                <a:cs typeface="Calibri" pitchFamily="34" charset="-120"/>
+              </a:rPr>
+              <a:t>Job wird aus offener Liste entfernt</a:t>
+            </a:r>
+            <a:endParaRPr lang="en-US" sz="1050" dirty="0"/>
+          </a:p>
+        </p:txBody>
+      </p:sp>
+      <p:sp>
+        <p:nvSpPr>
+          <p:cNvPr id="13" name="Shape 11"/>
+          <p:cNvSpPr/>
+          <p:nvPr/>
+        </p:nvSpPr>
+        <p:spPr>
+          <a:xfrm>
+            <a:off x="5943600" y="3291840"/>
+            <a:ext cx="2834640" cy="960120"/>
+          </a:xfrm>
+          <a:prstGeom prst="rect">
+            <a:avLst/>
+          </a:prstGeom>
+          <a:solidFill>
+            <a:srgbClr val="FFFFFF"/>
+          </a:solidFill>
+          <a:ln/>
+          <a:effectLst>
+            <a:outerShdw blurRad="50800" dist="25400" dir="8100000" algn="bl" rotWithShape="0">
+              <a:srgbClr val="000000">
+                <a:alpha val="10000"/>
+              </a:srgbClr>
+            </a:outerShdw>
+          </a:effectLst>
+        </p:spPr>
+        <p:txBody>
+          <a:bodyPr/>
+          <a:lstStyle/>
+          <a:p>
+            <a:endParaRPr lang="de-DE"/>
+          </a:p>
+        </p:txBody>
+      </p:sp>
+      <p:sp>
+        <p:nvSpPr>
+          <p:cNvPr id="14" name="Shape 12"/>
+          <p:cNvSpPr/>
+          <p:nvPr/>
+        </p:nvSpPr>
+        <p:spPr>
+          <a:xfrm>
+            <a:off x="5943600" y="3291840"/>
+            <a:ext cx="54864" cy="960120"/>
+          </a:xfrm>
+          <a:prstGeom prst="rect">
+            <a:avLst/>
+          </a:prstGeom>
+          <a:solidFill>
+            <a:srgbClr val="F59E0B"/>
+          </a:solidFill>
+          <a:ln/>
+        </p:spPr>
+        <p:txBody>
+          <a:bodyPr/>
+          <a:lstStyle/>
+          <a:p>
+            <a:endParaRPr lang="de-DE"/>
+          </a:p>
+        </p:txBody>
+      </p:sp>
+      <p:sp>
+        <p:nvSpPr>
+          <p:cNvPr id="15" name="Text 13"/>
+          <p:cNvSpPr/>
+          <p:nvPr/>
+        </p:nvSpPr>
+        <p:spPr>
+          <a:xfrm>
+            <a:off x="6172200" y="3383280"/>
+            <a:ext cx="2468880" cy="274320"/>
+          </a:xfrm>
+          <a:prstGeom prst="rect">
+            <a:avLst/>
+          </a:prstGeom>
+          <a:noFill/>
+          <a:ln/>
+        </p:spPr>
+        <p:txBody>
+          <a:bodyPr wrap="square" lIns="0" tIns="0" rIns="0" bIns="0" rtlCol="0" anchor="ctr"/>
+          <a:lstStyle/>
+          <a:p>
+            <a:pPr marL="0" indent="0">
+              <a:buNone/>
+            </a:pPr>
+            <a:r>
+              <a:rPr lang="en-US" sz="1200" b="1" dirty="0">
+                <a:solidFill>
+                  <a:srgbClr val="F59E0B"/>
+                </a:solidFill>
+                <a:latin typeface="Calibri" pitchFamily="34" charset="0"/>
+                <a:ea typeface="Calibri" pitchFamily="34" charset="-122"/>
+                <a:cs typeface="Calibri" pitchFamily="34" charset="-120"/>
+              </a:rPr>
+              <a:t>setPubSubDomain(true)</a:t>
+            </a:r>
+            <a:endParaRPr lang="en-US" sz="1200" dirty="0"/>
+          </a:p>
+        </p:txBody>
+      </p:sp>
+      <p:sp>
+        <p:nvSpPr>
+          <p:cNvPr id="16" name="Text 14"/>
+          <p:cNvSpPr/>
+          <p:nvPr/>
+        </p:nvSpPr>
+        <p:spPr>
+          <a:xfrm>
+            <a:off x="6172200" y="3703320"/>
+            <a:ext cx="2468880" cy="457200"/>
+          </a:xfrm>
+          <a:prstGeom prst="rect">
+            <a:avLst/>
+          </a:prstGeom>
+          <a:noFill/>
+          <a:ln/>
+        </p:spPr>
+        <p:txBody>
+          <a:bodyPr wrap="square" lIns="0" tIns="0" rIns="0" bIns="0" rtlCol="0" anchor="ctr"/>
+          <a:lstStyle/>
+          <a:p>
+            <a:pPr marL="0" indent="0">
+              <a:buNone/>
+            </a:pPr>
+            <a:r>
+              <a:rPr lang="en-US" sz="1050" dirty="0">
+                <a:solidFill>
+                  <a:srgbClr val="64748B"/>
+                </a:solidFill>
+                <a:latin typeface="Calibri" pitchFamily="34" charset="0"/>
+                <a:ea typeface="Calibri" pitchFamily="34" charset="-122"/>
+                <a:cs typeface="Calibri" pitchFamily="34" charset="-120"/>
+              </a:rPr>
+              <a:t>Konfiguriert Factory für Topics</a:t>
+            </a:r>
+            <a:endParaRPr lang="en-US" sz="1050" dirty="0"/>
+          </a:p>
+          <a:p>
+            <a:pPr marL="0" indent="0">
+              <a:buNone/>
+            </a:pPr>
+            <a:r>
+              <a:rPr lang="en-US" sz="1050" dirty="0">
+                <a:solidFill>
+                  <a:srgbClr val="64748B"/>
+                </a:solidFill>
+                <a:latin typeface="Calibri" pitchFamily="34" charset="0"/>
+                <a:ea typeface="Calibri" pitchFamily="34" charset="-122"/>
+                <a:cs typeface="Calibri" pitchFamily="34" charset="-120"/>
+              </a:rPr>
+              <a:t>Ohne diese Zeile: keine Nachrichten!</a:t>
+            </a:r>
+            <a:endParaRPr lang="en-US" sz="1050" dirty="0"/>
+          </a:p>
+        </p:txBody>
+      </p:sp>
+    </p:spTree>
+  </p:cSld>
+  <p:clrMapOvr>
+    <a:masterClrMapping/>
+  </p:clrMapOvr>
+</p:sld>
+</file>
+
+<file path=ppt/slides/slide11.xml><?xml version="1.0" encoding="utf-8"?>
+<p:sld xmlns:a="http://schemas.openxmlformats.org/drawingml/2006/main" xmlns:r="http://schemas.openxmlformats.org/officeDocument/2006/relationships" xmlns:p="http://schemas.openxmlformats.org/presentationml/2006/main">
   <p:cSld name="Slide 10">
     <p:bg>
       <p:bgPr>
@@ -5004,7 +5867,7 @@
 </p:sld>
 </file>
 
-<file path=ppt/slides/slide11.xml><?xml version="1.0" encoding="utf-8"?>
+<file path=ppt/slides/slide12.xml><?xml version="1.0" encoding="utf-8"?>
 <p:sld xmlns:a="http://schemas.openxmlformats.org/drawingml/2006/main" xmlns:r="http://schemas.openxmlformats.org/officeDocument/2006/relationships" xmlns:p="http://schemas.openxmlformats.org/presentationml/2006/main">
   <p:cSld name="Slide 11">
     <p:bg>
@@ -5922,7 +6785,7 @@
 </p:sld>
 </file>
 
-<file path=ppt/slides/slide12.xml><?xml version="1.0" encoding="utf-8"?>
+<file path=ppt/slides/slide13.xml><?xml version="1.0" encoding="utf-8"?>
 <p:sld xmlns:a="http://schemas.openxmlformats.org/drawingml/2006/main" xmlns:r="http://schemas.openxmlformats.org/officeDocument/2006/relationships" xmlns:p="http://schemas.openxmlformats.org/presentationml/2006/main">
   <p:cSld name="Slide 12">
     <p:bg>
@@ -6576,7 +7439,7 @@
 </p:sld>
 </file>
 
-<file path=ppt/slides/slide13.xml><?xml version="1.0" encoding="utf-8"?>
+<file path=ppt/slides/slide14.xml><?xml version="1.0" encoding="utf-8"?>
 <p:sld xmlns:a="http://schemas.openxmlformats.org/drawingml/2006/main" xmlns:r="http://schemas.openxmlformats.org/officeDocument/2006/relationships" xmlns:p="http://schemas.openxmlformats.org/presentationml/2006/main">
   <p:cSld name="Slide 13">
     <p:bg>
@@ -6799,600 +7662,6 @@
           <a:lstStyle/>
           <a:p>
             <a:endParaRPr lang="de-DE"/>
-          </a:p>
-        </p:txBody>
-      </p:sp>
-    </p:spTree>
-  </p:cSld>
-  <p:clrMapOvr>
-    <a:masterClrMapping/>
-  </p:clrMapOvr>
-</p:sld>
-</file>
-
-<file path=ppt/slides/slide14.xml><?xml version="1.0" encoding="utf-8"?>
-<p:sld xmlns:a="http://schemas.openxmlformats.org/drawingml/2006/main" xmlns:r="http://schemas.openxmlformats.org/officeDocument/2006/relationships" xmlns:p="http://schemas.openxmlformats.org/presentationml/2006/main">
-  <p:cSld name="Slide 14">
-    <p:bg>
-      <p:bgPr>
-        <a:solidFill>
-          <a:srgbClr val="F8FAFC"/>
-        </a:solidFill>
-        <a:effectLst/>
-      </p:bgPr>
-    </p:bg>
-    <p:spTree>
-      <p:nvGrpSpPr>
-        <p:cNvPr id="1" name=""/>
-        <p:cNvGrpSpPr/>
-        <p:nvPr/>
-      </p:nvGrpSpPr>
-      <p:grpSpPr>
-        <a:xfrm>
-          <a:off x="0" y="0"/>
-          <a:ext cx="0" cy="0"/>
-          <a:chOff x="0" y="0"/>
-          <a:chExt cx="0" cy="0"/>
-        </a:xfrm>
-      </p:grpSpPr>
-      <!-- Title: Ausgangslage -->
-      <p:sp>
-        <p:nvSpPr>
-          <p:cNvPr id="2" name="Title"/>
-          <p:cNvSpPr/>
-          <p:nvPr/>
-        </p:nvSpPr>
-        <p:spPr>
-          <a:xfrm>
-            <a:off x="731520" y="365760"/>
-            <a:ext cx="7680960" cy="640080"/>
-          </a:xfrm>
-          <a:prstGeom prst="rect">
-            <a:avLst/>
-          </a:prstGeom>
-          <a:noFill/>
-          <a:ln/>
-        </p:spPr>
-        <p:txBody>
-          <a:bodyPr wrap="square" lIns="0" tIns="0" rIns="0" bIns="0" rtlCol="0" anchor="ctr"/>
-          <a:lstStyle/>
-          <a:p>
-            <a:pPr marL="0" indent="0">
-              <a:buNone/>
-            </a:pPr>
-            <a:r>
-              <a:rPr lang="de-DE" sz="3200" b="1" dirty="0">
-                <a:solidFill>
-                  <a:srgbClr val="0F1B2D"/>
-                </a:solidFill>
-                <a:latin typeface="Georgia" pitchFamily="34" charset="0"/>
-                <a:ea typeface="Georgia" pitchFamily="34" charset="-122"/>
-                <a:cs typeface="Georgia" pitchFamily="34" charset="-120"/>
-              </a:rPr>
-              <a:t>Ausgangslage</a:t>
-            </a:r>
-            <a:endParaRPr lang="de-DE" sz="3200" dirty="0"/>
-          </a:p>
-        </p:txBody>
-      </p:sp>
-      <!-- Subtitle -->
-      <p:sp>
-        <p:nvSpPr>
-          <p:cNvPr id="9" name="Subtitle"/>
-          <p:cNvSpPr/>
-          <p:nvPr/>
-        </p:nvSpPr>
-        <p:spPr>
-          <a:xfrm>
-            <a:off x="731520" y="731520"/>
-            <a:ext cx="7680960" cy="274320"/>
-          </a:xfrm>
-          <a:prstGeom prst="rect">
-            <a:avLst/>
-          </a:prstGeom>
-          <a:noFill/>
-          <a:ln/>
-        </p:spPr>
-        <p:txBody>
-          <a:bodyPr wrap="square" lIns="0" tIns="0" rIns="0" bIns="0" rtlCol="0" anchor="ctr"/>
-          <a:lstStyle/>
-          <a:p>
-            <a:pPr marL="0" indent="0">
-              <a:buNone/>
-            </a:pPr>
-            <a:r>
-              <a:rPr lang="de-DE" sz="1400" dirty="0">
-                <a:solidFill>
-                  <a:srgbClr val="64748B"/>
-                </a:solidFill>
-                <a:latin typeface="Calibri" pitchFamily="34" charset="0"/>
-                <a:ea typeface="Calibri" pitchFamily="34" charset="-122"/>
-                <a:cs typeface="Calibri" pitchFamily="34" charset="-120"/>
-              </a:rPr>
-              <a:t>Von statischer Disposition zu dynamischer Selbstkoordination</a:t>
-            </a:r>
-            <a:endParaRPr lang="de-DE" sz="1400" dirty="0"/>
-          </a:p>
-        </p:txBody>
-      </p:sp>
-      <!-- Left column: Ist-Zustand card background -->
-      <p:sp>
-        <p:nvSpPr>
-          <p:cNvPr id="10" name="CardBgLeft"/>
-          <p:cNvSpPr/>
-          <p:nvPr/>
-        </p:nvSpPr>
-        <p:spPr>
-          <a:xfrm>
-            <a:off x="731520" y="1097280"/>
-            <a:ext cx="3748400" cy="3017520"/>
-          </a:xfrm>
-          <a:prstGeom prst="roundRect">
-            <a:avLst>
-              <a:gd name="adj" fmla="val 3000"/>
-            </a:avLst>
-          </a:prstGeom>
-          <a:solidFill>
-            <a:srgbClr val="FFFFFF"/>
-          </a:solidFill>
-          <a:ln w="12700">
-            <a:solidFill>
-              <a:srgbClr val="E2E8F0"/>
-            </a:solidFill>
-          </a:ln>
-          <a:effectLst>
-            <a:outerShdw blurRad="50800" dist="25400" dir="8100000" algn="bl" rotWithShape="0">
-              <a:srgbClr val="000000">
-                <a:alpha val="8000"/>
-              </a:srgbClr>
-            </a:outerShdw>
-          </a:effectLst>
-        </p:spPr>
-        <p:txBody>
-          <a:bodyPr/>
-          <a:lstStyle/>
-          <a:p>
-            <a:endParaRPr lang="de-DE"/>
-          </a:p>
-        </p:txBody>
-      </p:sp>
-      <!-- Left column header: Ist-Zustand -->
-      <p:sp>
-        <p:nvSpPr>
-          <p:cNvPr id="3" name="HeaderLeft"/>
-          <p:cNvSpPr/>
-          <p:nvPr/>
-        </p:nvSpPr>
-        <p:spPr>
-          <a:xfrm>
-            <a:off x="914400" y="1188720"/>
-            <a:ext cx="3382960" cy="365760"/>
-          </a:xfrm>
-          <a:prstGeom prst="rect">
-            <a:avLst/>
-          </a:prstGeom>
-          <a:noFill/>
-          <a:ln/>
-        </p:spPr>
-        <p:txBody>
-          <a:bodyPr wrap="square" lIns="0" tIns="0" rIns="0" bIns="0" rtlCol="0" anchor="ctr"/>
-          <a:lstStyle/>
-          <a:p>
-            <a:pPr marL="0" indent="0">
-              <a:buNone/>
-            </a:pPr>
-            <a:r>
-              <a:rPr lang="de-DE" sz="1800" b="1" dirty="0">
-                <a:solidFill>
-                  <a:srgbClr val="DC2626"/>
-                </a:solidFill>
-                <a:latin typeface="Calibri" pitchFamily="34" charset="0"/>
-                <a:ea typeface="Calibri" pitchFamily="34" charset="-122"/>
-                <a:cs typeface="Calibri" pitchFamily="34" charset="-120"/>
-              </a:rPr>
-              <a:t>Ist-Zustand</a:t>
-            </a:r>
-            <a:endParaRPr lang="de-DE" sz="1800" dirty="0"/>
-          </a:p>
-        </p:txBody>
-      </p:sp>
-      <!-- Left column content -->
-      <p:sp>
-        <p:nvSpPr>
-          <p:cNvPr id="4" name="ContentLeft"/>
-          <p:cNvSpPr/>
-          <p:nvPr/>
-        </p:nvSpPr>
-        <p:spPr>
-          <a:xfrm>
-            <a:off x="914400" y="1600200"/>
-            <a:ext cx="3382960" cy="2377440"/>
-          </a:xfrm>
-          <a:prstGeom prst="rect">
-            <a:avLst/>
-          </a:prstGeom>
-          <a:noFill/>
-          <a:ln/>
-        </p:spPr>
-        <p:txBody>
-          <a:bodyPr wrap="square" rtlCol="0" anchor="t"/>
-          <a:lstStyle/>
-          <a:p>
-            <a:pPr marL="342900" indent="-342900">
-              <a:buSzPct val="100000"/>
-              <a:buChar char="✖"/>
-            </a:pPr>
-            <a:r>
-              <a:rPr lang="de-DE" sz="1300" dirty="0">
-                <a:solidFill>
-                  <a:srgbClr val="1E293B"/>
-                </a:solidFill>
-                <a:latin typeface="Calibri" pitchFamily="34" charset="0"/>
-                <a:ea typeface="Calibri" pitchFamily="34" charset="-122"/>
-                <a:cs typeface="Calibri" pitchFamily="34" charset="-120"/>
-              </a:rPr>
-              <a:t>Statische Planung durch die Dispositionsabteilung</a:t>
-            </a:r>
-          </a:p>
-          <a:p>
-            <a:pPr marL="0" indent="0">
-              <a:buNone/>
-            </a:pPr>
-            <a:endParaRPr lang="de-DE" sz="800" dirty="0"/>
-          </a:p>
-          <a:p>
-            <a:pPr marL="342900" indent="-342900">
-              <a:buSzPct val="100000"/>
-              <a:buChar char="✖"/>
-            </a:pPr>
-            <a:r>
-              <a:rPr lang="de-DE" sz="1300" dirty="0">
-                <a:solidFill>
-                  <a:srgbClr val="1E293B"/>
-                </a:solidFill>
-                <a:latin typeface="Calibri" pitchFamily="34" charset="0"/>
-                <a:ea typeface="Calibri" pitchFamily="34" charset="-122"/>
-                <a:cs typeface="Calibri" pitchFamily="34" charset="-120"/>
-              </a:rPr>
-              <a:t>Alle Aufträge werden zentral koordiniert</a:t>
-            </a:r>
-          </a:p>
-          <a:p>
-            <a:pPr marL="0" indent="0">
-              <a:buNone/>
-            </a:pPr>
-            <a:endParaRPr lang="de-DE" sz="800" dirty="0"/>
-          </a:p>
-          <a:p>
-            <a:pPr marL="342900" indent="-342900">
-              <a:buSzPct val="100000"/>
-              <a:buChar char="✖"/>
-            </a:pPr>
-            <a:r>
-              <a:rPr lang="de-DE" sz="1300" dirty="0">
-                <a:solidFill>
-                  <a:srgbClr val="1E293B"/>
-                </a:solidFill>
-                <a:latin typeface="Calibri" pitchFamily="34" charset="0"/>
-                <a:ea typeface="Calibri" pitchFamily="34" charset="-122"/>
-                <a:cs typeface="Calibri" pitchFamily="34" charset="-120"/>
-              </a:rPr>
-              <a:t>Aussendienst hat keine Flexibilität</a:t>
-            </a:r>
-          </a:p>
-          <a:p>
-            <a:pPr marL="0" indent="0">
-              <a:buNone/>
-            </a:pPr>
-            <a:endParaRPr lang="de-DE" sz="800" dirty="0"/>
-          </a:p>
-          <a:p>
-            <a:pPr marL="342900" indent="-342900">
-              <a:buSzPct val="100000"/>
-              <a:buChar char="✖"/>
-            </a:pPr>
-            <a:r>
-              <a:rPr lang="de-DE" sz="1300" dirty="0">
-                <a:solidFill>
-                  <a:srgbClr val="1E293B"/>
-                </a:solidFill>
-                <a:latin typeface="Calibri" pitchFamily="34" charset="0"/>
-                <a:ea typeface="Calibri" pitchFamily="34" charset="-122"/>
-                <a:cs typeface="Calibri" pitchFamily="34" charset="-120"/>
-              </a:rPr>
-              <a:t>Leerlaufzeiten werden nicht dynamisch genutzt</a:t>
-            </a:r>
-          </a:p>
-        </p:txBody>
-      </p:sp>
-      <!-- Right column: Soll-Zustand card background -->
-      <p:sp>
-        <p:nvSpPr>
-          <p:cNvPr id="11" name="CardBgRight"/>
-          <p:cNvSpPr/>
-          <p:nvPr/>
-        </p:nvSpPr>
-        <p:spPr>
-          <a:xfrm>
-            <a:off x="4663440" y="1097280"/>
-            <a:ext cx="3748400" cy="3017520"/>
-          </a:xfrm>
-          <a:prstGeom prst="roundRect">
-            <a:avLst>
-              <a:gd name="adj" fmla="val 3000"/>
-            </a:avLst>
-          </a:prstGeom>
-          <a:solidFill>
-            <a:srgbClr val="FFFFFF"/>
-          </a:solidFill>
-          <a:ln w="12700">
-            <a:solidFill>
-              <a:srgbClr val="E2E8F0"/>
-            </a:solidFill>
-          </a:ln>
-          <a:effectLst>
-            <a:outerShdw blurRad="50800" dist="25400" dir="8100000" algn="bl" rotWithShape="0">
-              <a:srgbClr val="000000">
-                <a:alpha val="8000"/>
-              </a:srgbClr>
-            </a:outerShdw>
-          </a:effectLst>
-        </p:spPr>
-        <p:txBody>
-          <a:bodyPr/>
-          <a:lstStyle/>
-          <a:p>
-            <a:endParaRPr lang="de-DE"/>
-          </a:p>
-        </p:txBody>
-      </p:sp>
-      <!-- Right column header: Soll-Zustand -->
-      <p:sp>
-        <p:nvSpPr>
-          <p:cNvPr id="5" name="HeaderRight"/>
-          <p:cNvSpPr/>
-          <p:nvPr/>
-        </p:nvSpPr>
-        <p:spPr>
-          <a:xfrm>
-            <a:off x="4846320" y="1188720"/>
-            <a:ext cx="3382960" cy="365760"/>
-          </a:xfrm>
-          <a:prstGeom prst="rect">
-            <a:avLst/>
-          </a:prstGeom>
-          <a:noFill/>
-          <a:ln/>
-        </p:spPr>
-        <p:txBody>
-          <a:bodyPr wrap="square" lIns="0" tIns="0" rIns="0" bIns="0" rtlCol="0" anchor="ctr"/>
-          <a:lstStyle/>
-          <a:p>
-            <a:pPr marL="0" indent="0">
-              <a:buNone/>
-            </a:pPr>
-            <a:r>
-              <a:rPr lang="de-DE" sz="1800" b="1" dirty="0">
-                <a:solidFill>
-                  <a:srgbClr val="16A34A"/>
-                </a:solidFill>
-                <a:latin typeface="Calibri" pitchFamily="34" charset="0"/>
-                <a:ea typeface="Calibri" pitchFamily="34" charset="-122"/>
-                <a:cs typeface="Calibri" pitchFamily="34" charset="-120"/>
-              </a:rPr>
-              <a:t>Soll-Zustand</a:t>
-            </a:r>
-            <a:endParaRPr lang="de-DE" sz="1800" dirty="0"/>
-          </a:p>
-        </p:txBody>
-      </p:sp>
-      <!-- Right column content -->
-      <p:sp>
-        <p:nvSpPr>
-          <p:cNvPr id="6" name="ContentRight"/>
-          <p:cNvSpPr/>
-          <p:nvPr/>
-        </p:nvSpPr>
-        <p:spPr>
-          <a:xfrm>
-            <a:off x="4846320" y="1600200"/>
-            <a:ext cx="3382960" cy="2377440"/>
-          </a:xfrm>
-          <a:prstGeom prst="rect">
-            <a:avLst/>
-          </a:prstGeom>
-          <a:noFill/>
-          <a:ln/>
-        </p:spPr>
-        <p:txBody>
-          <a:bodyPr wrap="square" rtlCol="0" anchor="t"/>
-          <a:lstStyle/>
-          <a:p>
-            <a:pPr marL="342900" indent="-342900">
-              <a:buSzPct val="100000"/>
-              <a:buChar char="✔"/>
-            </a:pPr>
-            <a:r>
-              <a:rPr lang="de-DE" sz="1300" dirty="0">
-                <a:solidFill>
-                  <a:srgbClr val="1E293B"/>
-                </a:solidFill>
-                <a:latin typeface="Calibri" pitchFamily="34" charset="0"/>
-                <a:ea typeface="Calibri" pitchFamily="34" charset="-122"/>
-                <a:cs typeface="Calibri" pitchFamily="34" charset="-120"/>
-              </a:rPr>
-              <a:t>Dynamische Auftragsannahme durch Aussendienst</a:t>
-            </a:r>
-          </a:p>
-          <a:p>
-            <a:pPr marL="0" indent="0">
-              <a:buNone/>
-            </a:pPr>
-            <a:endParaRPr lang="de-DE" sz="800" dirty="0"/>
-          </a:p>
-          <a:p>
-            <a:pPr marL="342900" indent="-342900">
-              <a:buSzPct val="100000"/>
-              <a:buChar char="✔"/>
-            </a:pPr>
-            <a:r>
-              <a:rPr lang="de-DE" sz="1300" dirty="0">
-                <a:solidFill>
-                  <a:srgbClr val="1E293B"/>
-                </a:solidFill>
-                <a:latin typeface="Calibri" pitchFamily="34" charset="0"/>
-                <a:ea typeface="Calibri" pitchFamily="34" charset="-122"/>
-                <a:cs typeface="Calibri" pitchFamily="34" charset="-120"/>
-              </a:rPr>
-              <a:t>Unterscheidung: Routine vs. Dringend</a:t>
-            </a:r>
-          </a:p>
-          <a:p>
-            <a:pPr marL="0" indent="0">
-              <a:buNone/>
-            </a:pPr>
-            <a:endParaRPr lang="de-DE" sz="800" dirty="0"/>
-          </a:p>
-          <a:p>
-            <a:pPr marL="342900" indent="-342900">
-              <a:buSzPct val="100000"/>
-              <a:buChar char="✔"/>
-            </a:pPr>
-            <a:r>
-              <a:rPr lang="de-DE" sz="1300" dirty="0">
-                <a:solidFill>
-                  <a:srgbClr val="1E293B"/>
-                </a:solidFill>
-                <a:latin typeface="Calibri" pitchFamily="34" charset="0"/>
-                <a:ea typeface="Calibri" pitchFamily="34" charset="-122"/>
-                <a:cs typeface="Calibri" pitchFamily="34" charset="-120"/>
-              </a:rPr>
-              <a:t>Routineaufträge werden publiziert, Mitarbeitende nehmen selbst an</a:t>
-            </a:r>
-          </a:p>
-          <a:p>
-            <a:pPr marL="0" indent="0">
-              <a:buNone/>
-            </a:pPr>
-            <a:endParaRPr lang="de-DE" sz="800" dirty="0"/>
-          </a:p>
-          <a:p>
-            <a:pPr marL="342900" indent="-342900">
-              <a:buSzPct val="100000"/>
-              <a:buChar char="✔"/>
-            </a:pPr>
-            <a:r>
-              <a:rPr lang="de-DE" sz="1300" dirty="0">
-                <a:solidFill>
-                  <a:srgbClr val="1E293B"/>
-                </a:solidFill>
-                <a:latin typeface="Calibri" pitchFamily="34" charset="0"/>
-                <a:ea typeface="Calibri" pitchFamily="34" charset="-122"/>
-                <a:cs typeface="Calibri" pitchFamily="34" charset="-120"/>
-              </a:rPr>
-              <a:t>Leerlaufzeiten werden effizient genutzt</a:t>
-            </a:r>
-          </a:p>
-        </p:txBody>
-      </p:sp>
-      <!-- Arrow between columns -->
-      <p:sp>
-        <p:nvSpPr>
-          <p:cNvPr id="12" name="Arrow"/>
-          <p:cNvSpPr/>
-          <p:nvPr/>
-        </p:nvSpPr>
-        <p:spPr>
-          <a:xfrm>
-            <a:off x="4389120" y="2377440"/>
-            <a:ext cx="365760" cy="365760"/>
-          </a:xfrm>
-          <a:prstGeom prst="rightArrow">
-            <a:avLst>
-              <a:gd name="adj1" fmla="val 50000"/>
-              <a:gd name="adj2" fmla="val 50000"/>
-            </a:avLst>
-          </a:prstGeom>
-          <a:solidFill>
-            <a:srgbClr val="F59E0B"/>
-          </a:solidFill>
-          <a:ln>
-            <a:noFill/>
-          </a:ln>
-        </p:spPr>
-        <p:txBody>
-          <a:bodyPr/>
-          <a:lstStyle/>
-          <a:p>
-            <a:endParaRPr lang="de-DE"/>
-          </a:p>
-        </p:txBody>
-      </p:sp>
-      <!-- Bottom bar background -->
-      <p:sp>
-        <p:nvSpPr>
-          <p:cNvPr id="7" name="BottomBar"/>
-          <p:cNvSpPr/>
-          <p:nvPr/>
-        </p:nvSpPr>
-        <p:spPr>
-          <a:xfrm>
-            <a:off x="731520" y="4297680"/>
-            <a:ext cx="7680960" cy="502920"/>
-          </a:xfrm>
-          <a:prstGeom prst="rect">
-            <a:avLst/>
-          </a:prstGeom>
-          <a:solidFill>
-            <a:srgbClr val="065A82"/>
-          </a:solidFill>
-          <a:ln/>
-        </p:spPr>
-        <p:txBody>
-          <a:bodyPr/>
-          <a:lstStyle/>
-          <a:p>
-            <a:endParaRPr lang="de-DE"/>
-          </a:p>
-        </p:txBody>
-      </p:sp>
-      <!-- Bottom bar text -->
-      <p:sp>
-        <p:nvSpPr>
-          <p:cNvPr id="8" name="BottomText"/>
-          <p:cNvSpPr/>
-          <p:nvPr/>
-        </p:nvSpPr>
-        <p:spPr>
-          <a:xfrm>
-            <a:off x="1005840" y="4297680"/>
-            <a:ext cx="7406640" cy="502920"/>
-          </a:xfrm>
-          <a:prstGeom prst="rect">
-            <a:avLst/>
-          </a:prstGeom>
-          <a:noFill/>
-          <a:ln/>
-        </p:spPr>
-        <p:txBody>
-          <a:bodyPr wrap="square" rtlCol="0" anchor="ctr"/>
-          <a:lstStyle/>
-          <a:p>
-            <a:pPr marL="0" indent="0">
-              <a:buNone/>
-            </a:pPr>
-            <a:r>
-              <a:rPr lang="de-DE" sz="1300" b="1" i="1" dirty="0">
-                <a:solidFill>
-                  <a:srgbClr val="FFFFFF"/>
-                </a:solidFill>
-                <a:latin typeface="Calibri" pitchFamily="34" charset="0"/>
-                <a:ea typeface="Calibri" pitchFamily="34" charset="-122"/>
-                <a:cs typeface="Calibri" pitchFamily="34" charset="-120"/>
-              </a:rPr>
-              <a:t>Accolaia AG: Neues Dispositionskonzept – Routineaufträge dynamisch, Reparaturen weiterhin zentral koordiniert.</a:t>
-            </a:r>
-            <a:endParaRPr lang="de-DE" sz="1300" dirty="0"/>
           </a:p>
         </p:txBody>
       </p:sp>
@@ -8342,6 +8611,550 @@
 
 <file path=ppt/slides/slide3.xml><?xml version="1.0" encoding="utf-8"?>
 <p:sld xmlns:a="http://schemas.openxmlformats.org/drawingml/2006/main" xmlns:r="http://schemas.openxmlformats.org/officeDocument/2006/relationships" xmlns:p="http://schemas.openxmlformats.org/presentationml/2006/main">
+  <p:cSld name="Slide 14">
+    <p:bg>
+      <p:bgPr>
+        <a:solidFill>
+          <a:srgbClr val="F8FAFC"/>
+        </a:solidFill>
+        <a:effectLst/>
+      </p:bgPr>
+    </p:bg>
+    <p:spTree>
+      <p:nvGrpSpPr>
+        <p:cNvPr id="1" name=""/>
+        <p:cNvGrpSpPr/>
+        <p:nvPr/>
+      </p:nvGrpSpPr>
+      <p:grpSpPr>
+        <a:xfrm>
+          <a:off x="0" y="0"/>
+          <a:ext cx="0" cy="0"/>
+          <a:chOff x="0" y="0"/>
+          <a:chExt cx="0" cy="0"/>
+        </a:xfrm>
+      </p:grpSpPr>
+      <p:sp>
+        <p:nvSpPr>
+          <p:cNvPr id="2" name="Title"/>
+          <p:cNvSpPr/>
+          <p:nvPr/>
+        </p:nvSpPr>
+        <p:spPr>
+          <a:xfrm>
+            <a:off x="731520" y="365760"/>
+            <a:ext cx="7680960" cy="640080"/>
+          </a:xfrm>
+          <a:prstGeom prst="rect">
+            <a:avLst/>
+          </a:prstGeom>
+          <a:noFill/>
+          <a:ln/>
+        </p:spPr>
+        <p:txBody>
+          <a:bodyPr wrap="square" lIns="0" tIns="0" rIns="0" bIns="0" rtlCol="0" anchor="ctr"/>
+          <a:lstStyle/>
+          <a:p>
+            <a:pPr marL="0" indent="0">
+              <a:buNone/>
+            </a:pPr>
+            <a:r>
+              <a:rPr lang="de-DE" sz="3200" b="1" dirty="0">
+                <a:solidFill>
+                  <a:srgbClr val="0F1B2D"/>
+                </a:solidFill>
+                <a:latin typeface="Georgia" pitchFamily="34" charset="0"/>
+                <a:ea typeface="Georgia" pitchFamily="34" charset="-122"/>
+                <a:cs typeface="Georgia" pitchFamily="34" charset="-120"/>
+              </a:rPr>
+              <a:t>Ausgangslage</a:t>
+            </a:r>
+            <a:endParaRPr lang="de-DE" sz="3200" dirty="0"/>
+          </a:p>
+        </p:txBody>
+      </p:sp>
+      <p:sp>
+        <p:nvSpPr>
+          <p:cNvPr id="10" name="CardBgLeft"/>
+          <p:cNvSpPr/>
+          <p:nvPr/>
+        </p:nvSpPr>
+        <p:spPr>
+          <a:xfrm>
+            <a:off x="731520" y="1097280"/>
+            <a:ext cx="3748400" cy="3017520"/>
+          </a:xfrm>
+          <a:prstGeom prst="roundRect">
+            <a:avLst>
+              <a:gd name="adj" fmla="val 3000"/>
+            </a:avLst>
+          </a:prstGeom>
+          <a:solidFill>
+            <a:srgbClr val="FFFFFF"/>
+          </a:solidFill>
+          <a:ln w="12700">
+            <a:solidFill>
+              <a:srgbClr val="E2E8F0"/>
+            </a:solidFill>
+          </a:ln>
+          <a:effectLst>
+            <a:outerShdw blurRad="50800" dist="25400" dir="8100000" algn="bl" rotWithShape="0">
+              <a:srgbClr val="000000">
+                <a:alpha val="8000"/>
+              </a:srgbClr>
+            </a:outerShdw>
+          </a:effectLst>
+        </p:spPr>
+        <p:txBody>
+          <a:bodyPr/>
+          <a:lstStyle/>
+          <a:p>
+            <a:endParaRPr lang="de-DE"/>
+          </a:p>
+        </p:txBody>
+      </p:sp>
+      <p:sp>
+        <p:nvSpPr>
+          <p:cNvPr id="3" name="HeaderLeft"/>
+          <p:cNvSpPr/>
+          <p:nvPr/>
+        </p:nvSpPr>
+        <p:spPr>
+          <a:xfrm>
+            <a:off x="914400" y="1188720"/>
+            <a:ext cx="3382960" cy="365760"/>
+          </a:xfrm>
+          <a:prstGeom prst="rect">
+            <a:avLst/>
+          </a:prstGeom>
+          <a:noFill/>
+          <a:ln/>
+        </p:spPr>
+        <p:txBody>
+          <a:bodyPr wrap="square" lIns="0" tIns="0" rIns="0" bIns="0" rtlCol="0" anchor="ctr"/>
+          <a:lstStyle/>
+          <a:p>
+            <a:pPr marL="0" indent="0">
+              <a:buNone/>
+            </a:pPr>
+            <a:r>
+              <a:rPr lang="de-DE" sz="1800" b="1" dirty="0">
+                <a:solidFill>
+                  <a:srgbClr val="DC2626"/>
+                </a:solidFill>
+                <a:latin typeface="Calibri" pitchFamily="34" charset="0"/>
+                <a:ea typeface="Calibri" pitchFamily="34" charset="-122"/>
+                <a:cs typeface="Calibri" pitchFamily="34" charset="-120"/>
+              </a:rPr>
+              <a:t>Ist-Zustand</a:t>
+            </a:r>
+            <a:endParaRPr lang="de-DE" sz="1800" dirty="0"/>
+          </a:p>
+        </p:txBody>
+      </p:sp>
+      <p:sp>
+        <p:nvSpPr>
+          <p:cNvPr id="4" name="ContentLeft"/>
+          <p:cNvSpPr/>
+          <p:nvPr/>
+        </p:nvSpPr>
+        <p:spPr>
+          <a:xfrm>
+            <a:off x="914400" y="1600200"/>
+            <a:ext cx="3382960" cy="2377440"/>
+          </a:xfrm>
+          <a:prstGeom prst="rect">
+            <a:avLst/>
+          </a:prstGeom>
+          <a:noFill/>
+          <a:ln/>
+        </p:spPr>
+        <p:txBody>
+          <a:bodyPr wrap="square" rtlCol="0" anchor="t"/>
+          <a:lstStyle/>
+          <a:p>
+            <a:pPr marL="342900" indent="-342900">
+              <a:buSzPct val="100000"/>
+              <a:buChar char="✖"/>
+            </a:pPr>
+            <a:r>
+              <a:rPr lang="de-DE" sz="1300" dirty="0">
+                <a:solidFill>
+                  <a:srgbClr val="1E293B"/>
+                </a:solidFill>
+                <a:latin typeface="Calibri" pitchFamily="34" charset="0"/>
+                <a:ea typeface="Calibri" pitchFamily="34" charset="-122"/>
+                <a:cs typeface="Calibri" pitchFamily="34" charset="-120"/>
+              </a:rPr>
+              <a:t>Statische Planung durch die Dispositionsabteilung</a:t>
+            </a:r>
+          </a:p>
+          <a:p>
+            <a:pPr marL="0" indent="0">
+              <a:buNone/>
+            </a:pPr>
+            <a:endParaRPr lang="de-DE" sz="800" dirty="0"/>
+          </a:p>
+          <a:p>
+            <a:pPr marL="342900" indent="-342900">
+              <a:buSzPct val="100000"/>
+              <a:buChar char="✖"/>
+            </a:pPr>
+            <a:r>
+              <a:rPr lang="de-DE" sz="1300" dirty="0">
+                <a:solidFill>
+                  <a:srgbClr val="1E293B"/>
+                </a:solidFill>
+                <a:latin typeface="Calibri" pitchFamily="34" charset="0"/>
+                <a:ea typeface="Calibri" pitchFamily="34" charset="-122"/>
+                <a:cs typeface="Calibri" pitchFamily="34" charset="-120"/>
+              </a:rPr>
+              <a:t>Alle Aufträge werden zentral koordiniert</a:t>
+            </a:r>
+          </a:p>
+          <a:p>
+            <a:pPr marL="0" indent="0">
+              <a:buNone/>
+            </a:pPr>
+            <a:endParaRPr lang="de-DE" sz="800" dirty="0"/>
+          </a:p>
+          <a:p>
+            <a:pPr marL="342900" indent="-342900">
+              <a:buSzPct val="100000"/>
+              <a:buChar char="✖"/>
+            </a:pPr>
+            <a:r>
+              <a:rPr lang="de-DE" sz="1300" dirty="0">
+                <a:solidFill>
+                  <a:srgbClr val="1E293B"/>
+                </a:solidFill>
+                <a:latin typeface="Calibri" pitchFamily="34" charset="0"/>
+                <a:ea typeface="Calibri" pitchFamily="34" charset="-122"/>
+                <a:cs typeface="Calibri" pitchFamily="34" charset="-120"/>
+              </a:rPr>
+              <a:t>Aussendienst hat keine Flexibilität</a:t>
+            </a:r>
+          </a:p>
+          <a:p>
+            <a:pPr marL="0" indent="0">
+              <a:buNone/>
+            </a:pPr>
+            <a:endParaRPr lang="de-DE" sz="800" dirty="0"/>
+          </a:p>
+          <a:p>
+            <a:pPr marL="342900" indent="-342900">
+              <a:buSzPct val="100000"/>
+              <a:buChar char="✖"/>
+            </a:pPr>
+            <a:r>
+              <a:rPr lang="de-DE" sz="1300" dirty="0">
+                <a:solidFill>
+                  <a:srgbClr val="1E293B"/>
+                </a:solidFill>
+                <a:latin typeface="Calibri" pitchFamily="34" charset="0"/>
+                <a:ea typeface="Calibri" pitchFamily="34" charset="-122"/>
+                <a:cs typeface="Calibri" pitchFamily="34" charset="-120"/>
+              </a:rPr>
+              <a:t>Leerlaufzeiten werden nicht dynamisch genutzt</a:t>
+            </a:r>
+          </a:p>
+        </p:txBody>
+      </p:sp>
+      <p:sp>
+        <p:nvSpPr>
+          <p:cNvPr id="11" name="CardBgRight"/>
+          <p:cNvSpPr/>
+          <p:nvPr/>
+        </p:nvSpPr>
+        <p:spPr>
+          <a:xfrm>
+            <a:off x="4663440" y="1097280"/>
+            <a:ext cx="3748400" cy="3017520"/>
+          </a:xfrm>
+          <a:prstGeom prst="roundRect">
+            <a:avLst>
+              <a:gd name="adj" fmla="val 3000"/>
+            </a:avLst>
+          </a:prstGeom>
+          <a:solidFill>
+            <a:srgbClr val="FFFFFF"/>
+          </a:solidFill>
+          <a:ln w="12700">
+            <a:solidFill>
+              <a:srgbClr val="E2E8F0"/>
+            </a:solidFill>
+          </a:ln>
+          <a:effectLst>
+            <a:outerShdw blurRad="50800" dist="25400" dir="8100000" algn="bl" rotWithShape="0">
+              <a:srgbClr val="000000">
+                <a:alpha val="8000"/>
+              </a:srgbClr>
+            </a:outerShdw>
+          </a:effectLst>
+        </p:spPr>
+        <p:txBody>
+          <a:bodyPr/>
+          <a:lstStyle/>
+          <a:p>
+            <a:endParaRPr lang="de-DE"/>
+          </a:p>
+        </p:txBody>
+      </p:sp>
+      <p:sp>
+        <p:nvSpPr>
+          <p:cNvPr id="5" name="HeaderRight"/>
+          <p:cNvSpPr/>
+          <p:nvPr/>
+        </p:nvSpPr>
+        <p:spPr>
+          <a:xfrm>
+            <a:off x="4846320" y="1188720"/>
+            <a:ext cx="3382960" cy="365760"/>
+          </a:xfrm>
+          <a:prstGeom prst="rect">
+            <a:avLst/>
+          </a:prstGeom>
+          <a:noFill/>
+          <a:ln/>
+        </p:spPr>
+        <p:txBody>
+          <a:bodyPr wrap="square" lIns="0" tIns="0" rIns="0" bIns="0" rtlCol="0" anchor="ctr"/>
+          <a:lstStyle/>
+          <a:p>
+            <a:pPr marL="0" indent="0">
+              <a:buNone/>
+            </a:pPr>
+            <a:r>
+              <a:rPr lang="de-DE" sz="1800" b="1" dirty="0">
+                <a:solidFill>
+                  <a:srgbClr val="16A34A"/>
+                </a:solidFill>
+                <a:latin typeface="Calibri" pitchFamily="34" charset="0"/>
+                <a:ea typeface="Calibri" pitchFamily="34" charset="-122"/>
+                <a:cs typeface="Calibri" pitchFamily="34" charset="-120"/>
+              </a:rPr>
+              <a:t>Soll-Zustand</a:t>
+            </a:r>
+            <a:endParaRPr lang="de-DE" sz="1800" dirty="0"/>
+          </a:p>
+        </p:txBody>
+      </p:sp>
+      <p:sp>
+        <p:nvSpPr>
+          <p:cNvPr id="6" name="ContentRight"/>
+          <p:cNvSpPr/>
+          <p:nvPr/>
+        </p:nvSpPr>
+        <p:spPr>
+          <a:xfrm>
+            <a:off x="4846320" y="1600200"/>
+            <a:ext cx="3382960" cy="2377440"/>
+          </a:xfrm>
+          <a:prstGeom prst="rect">
+            <a:avLst/>
+          </a:prstGeom>
+          <a:noFill/>
+          <a:ln/>
+        </p:spPr>
+        <p:txBody>
+          <a:bodyPr wrap="square" rtlCol="0" anchor="t"/>
+          <a:lstStyle/>
+          <a:p>
+            <a:pPr marL="342900" indent="-342900">
+              <a:buSzPct val="100000"/>
+              <a:buChar char="✔"/>
+            </a:pPr>
+            <a:r>
+              <a:rPr lang="de-DE" sz="1300" dirty="0">
+                <a:solidFill>
+                  <a:srgbClr val="1E293B"/>
+                </a:solidFill>
+                <a:latin typeface="Calibri" pitchFamily="34" charset="0"/>
+                <a:ea typeface="Calibri" pitchFamily="34" charset="-122"/>
+                <a:cs typeface="Calibri" pitchFamily="34" charset="-120"/>
+              </a:rPr>
+              <a:t>Dynamische Auftragsannahme durch Aussendienst</a:t>
+            </a:r>
+          </a:p>
+          <a:p>
+            <a:pPr marL="0" indent="0">
+              <a:buNone/>
+            </a:pPr>
+            <a:endParaRPr lang="de-DE" sz="800" dirty="0"/>
+          </a:p>
+          <a:p>
+            <a:pPr marL="342900" indent="-342900">
+              <a:buSzPct val="100000"/>
+              <a:buChar char="✔"/>
+            </a:pPr>
+            <a:r>
+              <a:rPr lang="de-DE" sz="1300" dirty="0">
+                <a:solidFill>
+                  <a:srgbClr val="1E293B"/>
+                </a:solidFill>
+                <a:latin typeface="Calibri" pitchFamily="34" charset="0"/>
+                <a:ea typeface="Calibri" pitchFamily="34" charset="-122"/>
+                <a:cs typeface="Calibri" pitchFamily="34" charset="-120"/>
+              </a:rPr>
+              <a:t>Unterscheidung: Routine vs. Dringend</a:t>
+            </a:r>
+          </a:p>
+          <a:p>
+            <a:pPr marL="0" indent="0">
+              <a:buNone/>
+            </a:pPr>
+            <a:endParaRPr lang="de-DE" sz="800" dirty="0"/>
+          </a:p>
+          <a:p>
+            <a:pPr marL="342900" indent="-342900">
+              <a:buSzPct val="100000"/>
+              <a:buChar char="✔"/>
+            </a:pPr>
+            <a:r>
+              <a:rPr lang="de-DE" sz="1300" dirty="0">
+                <a:solidFill>
+                  <a:srgbClr val="1E293B"/>
+                </a:solidFill>
+                <a:latin typeface="Calibri" pitchFamily="34" charset="0"/>
+                <a:ea typeface="Calibri" pitchFamily="34" charset="-122"/>
+                <a:cs typeface="Calibri" pitchFamily="34" charset="-120"/>
+              </a:rPr>
+              <a:t>Routineaufträge werden publiziert, Mitarbeitende nehmen selbst an</a:t>
+            </a:r>
+          </a:p>
+          <a:p>
+            <a:pPr marL="0" indent="0">
+              <a:buNone/>
+            </a:pPr>
+            <a:endParaRPr lang="de-DE" sz="800" dirty="0"/>
+          </a:p>
+          <a:p>
+            <a:pPr marL="342900" indent="-342900">
+              <a:buSzPct val="100000"/>
+              <a:buChar char="✔"/>
+            </a:pPr>
+            <a:r>
+              <a:rPr lang="de-DE" sz="1300" dirty="0">
+                <a:solidFill>
+                  <a:srgbClr val="1E293B"/>
+                </a:solidFill>
+                <a:latin typeface="Calibri" pitchFamily="34" charset="0"/>
+                <a:ea typeface="Calibri" pitchFamily="34" charset="-122"/>
+                <a:cs typeface="Calibri" pitchFamily="34" charset="-120"/>
+              </a:rPr>
+              <a:t>Leerlaufzeiten werden effizient genutzt</a:t>
+            </a:r>
+          </a:p>
+        </p:txBody>
+      </p:sp>
+      <p:sp>
+        <p:nvSpPr>
+          <p:cNvPr id="12" name="Arrow"/>
+          <p:cNvSpPr/>
+          <p:nvPr/>
+        </p:nvSpPr>
+        <p:spPr>
+          <a:xfrm>
+            <a:off x="4389120" y="2377440"/>
+            <a:ext cx="365760" cy="365760"/>
+          </a:xfrm>
+          <a:prstGeom prst="rightArrow">
+            <a:avLst>
+              <a:gd name="adj1" fmla="val 50000"/>
+              <a:gd name="adj2" fmla="val 50000"/>
+            </a:avLst>
+          </a:prstGeom>
+          <a:solidFill>
+            <a:srgbClr val="F59E0B"/>
+          </a:solidFill>
+          <a:ln>
+            <a:noFill/>
+          </a:ln>
+        </p:spPr>
+        <p:txBody>
+          <a:bodyPr/>
+          <a:lstStyle/>
+          <a:p>
+            <a:endParaRPr lang="de-DE"/>
+          </a:p>
+        </p:txBody>
+      </p:sp>
+      <p:sp>
+        <p:nvSpPr>
+          <p:cNvPr id="7" name="BottomBar"/>
+          <p:cNvSpPr/>
+          <p:nvPr/>
+        </p:nvSpPr>
+        <p:spPr>
+          <a:xfrm>
+            <a:off x="731520" y="4297680"/>
+            <a:ext cx="7680960" cy="502920"/>
+          </a:xfrm>
+          <a:prstGeom prst="rect">
+            <a:avLst/>
+          </a:prstGeom>
+          <a:solidFill>
+            <a:srgbClr val="065A82"/>
+          </a:solidFill>
+          <a:ln/>
+        </p:spPr>
+        <p:txBody>
+          <a:bodyPr/>
+          <a:lstStyle/>
+          <a:p>
+            <a:endParaRPr lang="de-DE"/>
+          </a:p>
+        </p:txBody>
+      </p:sp>
+      <p:sp>
+        <p:nvSpPr>
+          <p:cNvPr id="8" name="BottomText"/>
+          <p:cNvSpPr/>
+          <p:nvPr/>
+        </p:nvSpPr>
+        <p:spPr>
+          <a:xfrm>
+            <a:off x="1005840" y="4297680"/>
+            <a:ext cx="7406640" cy="502920"/>
+          </a:xfrm>
+          <a:prstGeom prst="rect">
+            <a:avLst/>
+          </a:prstGeom>
+          <a:noFill/>
+          <a:ln/>
+        </p:spPr>
+        <p:txBody>
+          <a:bodyPr wrap="square" rtlCol="0" anchor="ctr"/>
+          <a:lstStyle/>
+          <a:p>
+            <a:pPr marL="0" indent="0">
+              <a:buNone/>
+            </a:pPr>
+            <a:r>
+              <a:rPr lang="de-DE" sz="1300" b="1" i="1" dirty="0">
+                <a:solidFill>
+                  <a:srgbClr val="FFFFFF"/>
+                </a:solidFill>
+                <a:latin typeface="Calibri" pitchFamily="34" charset="0"/>
+                <a:ea typeface="Calibri" pitchFamily="34" charset="-122"/>
+                <a:cs typeface="Calibri" pitchFamily="34" charset="-120"/>
+              </a:rPr>
+              <a:t>Accolaia AG: Neues Dispositionskonzept – Routineaufträge dynamisch, Reparaturen weiterhin zentral koordiniert.</a:t>
+            </a:r>
+            <a:endParaRPr lang="de-DE" sz="1300" dirty="0"/>
+          </a:p>
+        </p:txBody>
+      </p:sp>
+    </p:spTree>
+  </p:cSld>
+  <p:clrMapOvr>
+    <a:masterClrMapping/>
+  </p:clrMapOvr>
+</p:sld>
+</file>
+
+<file path=ppt/slides/slide4.xml><?xml version="1.0" encoding="utf-8"?>
+<p:sld xmlns:a="http://schemas.openxmlformats.org/drawingml/2006/main" xmlns:r="http://schemas.openxmlformats.org/officeDocument/2006/relationships" xmlns:p="http://schemas.openxmlformats.org/presentationml/2006/main">
   <p:cSld name="Slide 3">
     <p:bg>
       <p:bgPr>
@@ -8834,7 +9647,7 @@
 </p:sld>
 </file>
 
-<file path=ppt/slides/slide4.xml><?xml version="1.0" encoding="utf-8"?>
+<file path=ppt/slides/slide5.xml><?xml version="1.0" encoding="utf-8"?>
 <p:sld xmlns:a="http://schemas.openxmlformats.org/drawingml/2006/main" xmlns:r="http://schemas.openxmlformats.org/officeDocument/2006/relationships" xmlns:p="http://schemas.openxmlformats.org/presentationml/2006/main">
   <p:cSld name="Slide 4">
     <p:bg>
@@ -9444,7 +10257,7 @@
 </p:sld>
 </file>
 
-<file path=ppt/slides/slide5.xml><?xml version="1.0" encoding="utf-8"?>
+<file path=ppt/slides/slide6.xml><?xml version="1.0" encoding="utf-8"?>
 <p:sld xmlns:a="http://schemas.openxmlformats.org/drawingml/2006/main" xmlns:r="http://schemas.openxmlformats.org/officeDocument/2006/relationships" xmlns:p="http://schemas.openxmlformats.org/presentationml/2006/main">
   <p:cSld name="Slide 5">
     <p:bg>
@@ -10014,7 +10827,7 @@
 </p:sld>
 </file>
 
-<file path=ppt/slides/slide6.xml><?xml version="1.0" encoding="utf-8"?>
+<file path=ppt/slides/slide7.xml><?xml version="1.0" encoding="utf-8"?>
 <p:sld xmlns:a="http://schemas.openxmlformats.org/drawingml/2006/main" xmlns:r="http://schemas.openxmlformats.org/officeDocument/2006/relationships" xmlns:p="http://schemas.openxmlformats.org/presentationml/2006/main">
   <p:cSld name="Slide 6">
     <p:bg>
@@ -11823,7 +12636,7 @@
 </p:sld>
 </file>
 
-<file path=ppt/slides/slide7.xml><?xml version="1.0" encoding="utf-8"?>
+<file path=ppt/slides/slide8.xml><?xml version="1.0" encoding="utf-8"?>
 <p:sld xmlns:a="http://schemas.openxmlformats.org/drawingml/2006/main" xmlns:r="http://schemas.openxmlformats.org/officeDocument/2006/relationships" xmlns:p="http://schemas.openxmlformats.org/presentationml/2006/main">
   <p:cSld name="Slide 7">
     <p:bg>
@@ -12150,7 +12963,7 @@
 </p:sld>
 </file>
 
-<file path=ppt/slides/slide8.xml><?xml version="1.0" encoding="utf-8"?>
+<file path=ppt/slides/slide9.xml><?xml version="1.0" encoding="utf-8"?>
 <p:sld xmlns:a="http://schemas.openxmlformats.org/drawingml/2006/main" xmlns:r="http://schemas.openxmlformats.org/officeDocument/2006/relationships" xmlns:p="http://schemas.openxmlformats.org/presentationml/2006/main">
   <p:cSld name="Slide 8">
     <p:bg>
@@ -12932,869 +13745,6 @@
               <a:t>  Auftragsanforderung über Queue an Disposition senden</a:t>
             </a:r>
             <a:endParaRPr lang="en-US" sz="1300" dirty="0"/>
-          </a:p>
-        </p:txBody>
-      </p:sp>
-    </p:spTree>
-  </p:cSld>
-  <p:clrMapOvr>
-    <a:masterClrMapping/>
-  </p:clrMapOvr>
-</p:sld>
-</file>
-
-<file path=ppt/slides/slide9.xml><?xml version="1.0" encoding="utf-8"?>
-<p:sld xmlns:a="http://schemas.openxmlformats.org/drawingml/2006/main" xmlns:r="http://schemas.openxmlformats.org/officeDocument/2006/relationships" xmlns:p="http://schemas.openxmlformats.org/presentationml/2006/main">
-  <p:cSld name="Slide 9">
-    <p:bg>
-      <p:bgPr>
-        <a:solidFill>
-          <a:srgbClr val="F8FAFC"/>
-        </a:solidFill>
-        <a:effectLst/>
-      </p:bgPr>
-    </p:bg>
-    <p:spTree>
-      <p:nvGrpSpPr>
-        <p:cNvPr id="1" name=""/>
-        <p:cNvGrpSpPr/>
-        <p:nvPr/>
-      </p:nvGrpSpPr>
-      <p:grpSpPr>
-        <a:xfrm>
-          <a:off x="0" y="0"/>
-          <a:ext cx="0" cy="0"/>
-          <a:chOff x="0" y="0"/>
-          <a:chExt cx="0" cy="0"/>
-        </a:xfrm>
-      </p:grpSpPr>
-      <p:sp>
-        <p:nvSpPr>
-          <p:cNvPr id="2" name="Text 0"/>
-          <p:cNvSpPr/>
-          <p:nvPr/>
-        </p:nvSpPr>
-        <p:spPr>
-          <a:xfrm>
-            <a:off x="731520" y="274320"/>
-            <a:ext cx="7680960" cy="548640"/>
-          </a:xfrm>
-          <a:prstGeom prst="rect">
-            <a:avLst/>
-          </a:prstGeom>
-          <a:noFill/>
-          <a:ln/>
-        </p:spPr>
-        <p:txBody>
-          <a:bodyPr wrap="square" lIns="0" tIns="0" rIns="0" bIns="0" rtlCol="0" anchor="ctr"/>
-          <a:lstStyle/>
-          <a:p>
-            <a:pPr marL="0" indent="0">
-              <a:buNone/>
-            </a:pPr>
-            <a:r>
-              <a:rPr lang="en-US" sz="2600" b="1" dirty="0">
-                <a:solidFill>
-                  <a:srgbClr val="0F1B2D"/>
-                </a:solidFill>
-                <a:latin typeface="Georgia" pitchFamily="34" charset="0"/>
-                <a:ea typeface="Georgia" pitchFamily="34" charset="-122"/>
-                <a:cs typeface="Georgia" pitchFamily="34" charset="-120"/>
-              </a:rPr>
-              <a:t>Code: MessageReceiver.java</a:t>
-            </a:r>
-            <a:endParaRPr lang="en-US" sz="2600" dirty="0"/>
-          </a:p>
-        </p:txBody>
-      </p:sp>
-      <p:sp>
-        <p:nvSpPr>
-          <p:cNvPr id="3" name="Shape 1"/>
-          <p:cNvSpPr/>
-          <p:nvPr/>
-        </p:nvSpPr>
-        <p:spPr>
-          <a:xfrm>
-            <a:off x="457200" y="914400"/>
-            <a:ext cx="5303520" cy="3931920"/>
-          </a:xfrm>
-          <a:prstGeom prst="rect">
-            <a:avLst/>
-          </a:prstGeom>
-          <a:solidFill>
-            <a:srgbClr val="1E293B"/>
-          </a:solidFill>
-          <a:ln/>
-          <a:effectLst>
-            <a:outerShdw blurRad="50800" dist="25400" dir="8100000" algn="bl" rotWithShape="0">
-              <a:srgbClr val="000000">
-                <a:alpha val="10000"/>
-              </a:srgbClr>
-            </a:outerShdw>
-          </a:effectLst>
-        </p:spPr>
-        <p:txBody>
-          <a:bodyPr/>
-          <a:lstStyle/>
-          <a:p>
-            <a:endParaRPr lang="de-DE"/>
-          </a:p>
-        </p:txBody>
-      </p:sp>
-      <p:sp>
-        <p:nvSpPr>
-          <p:cNvPr id="4" name="Text 2"/>
-          <p:cNvSpPr/>
-          <p:nvPr/>
-        </p:nvSpPr>
-        <p:spPr>
-          <a:xfrm>
-            <a:off x="640080" y="1051560"/>
-            <a:ext cx="4937760" cy="3657600"/>
-          </a:xfrm>
-          <a:prstGeom prst="rect">
-            <a:avLst/>
-          </a:prstGeom>
-          <a:noFill/>
-          <a:ln/>
-        </p:spPr>
-        <p:txBody>
-          <a:bodyPr wrap="square" rtlCol="0" anchor="t"/>
-          <a:lstStyle/>
-          <a:p>
-            <a:pPr marL="0" indent="0">
-              <a:buNone/>
-            </a:pPr>
-            <a:r>
-              <a:rPr lang="en-US" sz="1000" dirty="0">
-                <a:solidFill>
-                  <a:srgbClr val="93C5FD"/>
-                </a:solidFill>
-                <a:latin typeface="Consolas" pitchFamily="34" charset="0"/>
-                <a:ea typeface="Consolas" pitchFamily="34" charset="-122"/>
-                <a:cs typeface="Consolas" pitchFamily="34" charset="-120"/>
-              </a:rPr>
-              <a:t>@JmsListener(destination = "dispo.jobs.new",</a:t>
-            </a:r>
-            <a:endParaRPr lang="en-US" sz="1000" dirty="0"/>
-          </a:p>
-          <a:p>
-            <a:pPr marL="0" indent="0">
-              <a:buNone/>
-            </a:pPr>
-            <a:r>
-              <a:rPr lang="en-US" sz="1000" dirty="0">
-                <a:solidFill>
-                  <a:srgbClr val="93C5FD"/>
-                </a:solidFill>
-                <a:latin typeface="Consolas" pitchFamily="34" charset="0"/>
-                <a:ea typeface="Consolas" pitchFamily="34" charset="-122"/>
-                <a:cs typeface="Consolas" pitchFamily="34" charset="-120"/>
-              </a:rPr>
-              <a:t>             containerFactory = "myFactory")</a:t>
-            </a:r>
-            <a:endParaRPr lang="en-US" sz="1000" dirty="0"/>
-          </a:p>
-          <a:p>
-            <a:pPr marL="0" indent="0">
-              <a:buNone/>
-            </a:pPr>
-            <a:r>
-              <a:rPr lang="en-US" sz="1000" dirty="0">
-                <a:solidFill>
-                  <a:srgbClr val="E2E8F0"/>
-                </a:solidFill>
-                <a:latin typeface="Consolas" pitchFamily="34" charset="0"/>
-                <a:ea typeface="Consolas" pitchFamily="34" charset="-122"/>
-                <a:cs typeface="Consolas" pitchFamily="34" charset="-120"/>
-              </a:rPr>
-              <a:t>public void receiveNewJob(JobMessage job) {</a:t>
-            </a:r>
-            <a:endParaRPr lang="en-US" sz="1000" dirty="0"/>
-          </a:p>
-          <a:p>
-            <a:pPr marL="0" indent="0">
-              <a:buNone/>
-            </a:pPr>
-            <a:r>
-              <a:rPr lang="en-US" sz="1000" dirty="0">
-                <a:solidFill>
-                  <a:srgbClr val="E2E8F0"/>
-                </a:solidFill>
-                <a:latin typeface="Consolas" pitchFamily="34" charset="0"/>
-                <a:ea typeface="Consolas" pitchFamily="34" charset="-122"/>
-                <a:cs typeface="Consolas" pitchFamily="34" charset="-120"/>
-              </a:rPr>
-              <a:t>    ui.addJobToList(job);</a:t>
-            </a:r>
-            <a:endParaRPr lang="en-US" sz="1000" dirty="0"/>
-          </a:p>
-          <a:p>
-            <a:pPr marL="0" indent="0">
-              <a:buNone/>
-            </a:pPr>
-            <a:r>
-              <a:rPr lang="en-US" sz="1000" dirty="0">
-                <a:solidFill>
-                  <a:srgbClr val="E2E8F0"/>
-                </a:solidFill>
-                <a:latin typeface="Consolas" pitchFamily="34" charset="0"/>
-                <a:ea typeface="Consolas" pitchFamily="34" charset="-122"/>
-                <a:cs typeface="Consolas" pitchFamily="34" charset="-120"/>
-              </a:rPr>
-              <a:t>}</a:t>
-            </a:r>
-            <a:endParaRPr lang="en-US" sz="1000" dirty="0"/>
-          </a:p>
-          <a:p>
-            <a:pPr marL="0" indent="0">
-              <a:buNone/>
-            </a:pPr>
-            <a:endParaRPr lang="en-US" sz="1000" dirty="0"/>
-          </a:p>
-          <a:p>
-            <a:pPr marL="0" indent="0">
-              <a:buNone/>
-            </a:pPr>
-            <a:r>
-              <a:rPr lang="en-US" sz="1000" dirty="0">
-                <a:solidFill>
-                  <a:srgbClr val="93C5FD"/>
-                </a:solidFill>
-                <a:latin typeface="Consolas" pitchFamily="34" charset="0"/>
-                <a:ea typeface="Consolas" pitchFamily="34" charset="-122"/>
-                <a:cs typeface="Consolas" pitchFamily="34" charset="-120"/>
-              </a:rPr>
-              <a:t>@JmsListener(destination = "dispo.jobs.assignments",</a:t>
-            </a:r>
-            <a:endParaRPr lang="en-US" sz="1000" dirty="0"/>
-          </a:p>
-          <a:p>
-            <a:pPr marL="0" indent="0">
-              <a:buNone/>
-            </a:pPr>
-            <a:r>
-              <a:rPr lang="en-US" sz="1000" dirty="0">
-                <a:solidFill>
-                  <a:srgbClr val="93C5FD"/>
-                </a:solidFill>
-                <a:latin typeface="Consolas" pitchFamily="34" charset="0"/>
-                <a:ea typeface="Consolas" pitchFamily="34" charset="-122"/>
-                <a:cs typeface="Consolas" pitchFamily="34" charset="-120"/>
-              </a:rPr>
-              <a:t>             containerFactory = "myFactory")</a:t>
-            </a:r>
-            <a:endParaRPr lang="en-US" sz="1000" dirty="0"/>
-          </a:p>
-          <a:p>
-            <a:pPr marL="0" indent="0">
-              <a:buNone/>
-            </a:pPr>
-            <a:r>
-              <a:rPr lang="en-US" sz="1000" dirty="0">
-                <a:solidFill>
-                  <a:srgbClr val="E2E8F0"/>
-                </a:solidFill>
-                <a:latin typeface="Consolas" pitchFamily="34" charset="0"/>
-                <a:ea typeface="Consolas" pitchFamily="34" charset="-122"/>
-                <a:cs typeface="Consolas" pitchFamily="34" charset="-120"/>
-              </a:rPr>
-              <a:t>public void receiveAssignment(</a:t>
-            </a:r>
-            <a:endParaRPr lang="en-US" sz="1000" dirty="0"/>
-          </a:p>
-          <a:p>
-            <a:pPr marL="0" indent="0">
-              <a:buNone/>
-            </a:pPr>
-            <a:r>
-              <a:rPr lang="en-US" sz="1000" dirty="0">
-                <a:solidFill>
-                  <a:srgbClr val="E2E8F0"/>
-                </a:solidFill>
-                <a:latin typeface="Consolas" pitchFamily="34" charset="0"/>
-                <a:ea typeface="Consolas" pitchFamily="34" charset="-122"/>
-                <a:cs typeface="Consolas" pitchFamily="34" charset="-120"/>
-              </a:rPr>
-              <a:t>        JobAssignmentMessage assignment) {</a:t>
-            </a:r>
-            <a:endParaRPr lang="en-US" sz="1000" dirty="0"/>
-          </a:p>
-          <a:p>
-            <a:pPr marL="0" indent="0">
-              <a:buNone/>
-            </a:pPr>
-            <a:r>
-              <a:rPr lang="en-US" sz="1000" dirty="0">
-                <a:solidFill>
-                  <a:srgbClr val="E2E8F0"/>
-                </a:solidFill>
-                <a:latin typeface="Consolas" pitchFamily="34" charset="0"/>
-                <a:ea typeface="Consolas" pitchFamily="34" charset="-122"/>
-                <a:cs typeface="Consolas" pitchFamily="34" charset="-120"/>
-              </a:rPr>
-              <a:t>    ui.assignJob(assignment);</a:t>
-            </a:r>
-            <a:endParaRPr lang="en-US" sz="1000" dirty="0"/>
-          </a:p>
-          <a:p>
-            <a:pPr marL="0" indent="0">
-              <a:buNone/>
-            </a:pPr>
-            <a:r>
-              <a:rPr lang="en-US" sz="1000" dirty="0">
-                <a:solidFill>
-                  <a:srgbClr val="E2E8F0"/>
-                </a:solidFill>
-                <a:latin typeface="Consolas" pitchFamily="34" charset="0"/>
-                <a:ea typeface="Consolas" pitchFamily="34" charset="-122"/>
-                <a:cs typeface="Consolas" pitchFamily="34" charset="-120"/>
-              </a:rPr>
-              <a:t>}</a:t>
-            </a:r>
-            <a:endParaRPr lang="en-US" sz="1000" dirty="0"/>
-          </a:p>
-          <a:p>
-            <a:pPr marL="0" indent="0">
-              <a:buNone/>
-            </a:pPr>
-            <a:endParaRPr lang="en-US" sz="1000" dirty="0"/>
-          </a:p>
-          <a:p>
-            <a:pPr marL="0" indent="0">
-              <a:buNone/>
-            </a:pPr>
-            <a:r>
-              <a:rPr lang="en-US" sz="1000" i="1" dirty="0">
-                <a:solidFill>
-                  <a:srgbClr val="6B7280"/>
-                </a:solidFill>
-                <a:latin typeface="Consolas" pitchFamily="34" charset="0"/>
-                <a:ea typeface="Consolas" pitchFamily="34" charset="-122"/>
-                <a:cs typeface="Consolas" pitchFamily="34" charset="-120"/>
-              </a:rPr>
-              <a:t>// Factory: Topic-Modus aktivieren</a:t>
-            </a:r>
-            <a:endParaRPr lang="en-US" sz="1000" dirty="0"/>
-          </a:p>
-          <a:p>
-            <a:pPr marL="0" indent="0">
-              <a:buNone/>
-            </a:pPr>
-            <a:r>
-              <a:rPr lang="en-US" sz="1000" b="1" dirty="0">
-                <a:solidFill>
-                  <a:srgbClr val="FCD34D"/>
-                </a:solidFill>
-                <a:latin typeface="Consolas" pitchFamily="34" charset="0"/>
-                <a:ea typeface="Consolas" pitchFamily="34" charset="-122"/>
-                <a:cs typeface="Consolas" pitchFamily="34" charset="-120"/>
-              </a:rPr>
-              <a:t>factory.setPubSubDomain(true);</a:t>
-            </a:r>
-            <a:endParaRPr lang="en-US" sz="1000" dirty="0"/>
-          </a:p>
-          <a:p>
-            <a:pPr marL="0" indent="0">
-              <a:buNone/>
-            </a:pPr>
-            <a:r>
-              <a:rPr lang="en-US" sz="1000" dirty="0">
-                <a:solidFill>
-                  <a:srgbClr val="E2E8F0"/>
-                </a:solidFill>
-                <a:latin typeface="Consolas" pitchFamily="34" charset="0"/>
-                <a:ea typeface="Consolas" pitchFamily="34" charset="-122"/>
-                <a:cs typeface="Consolas" pitchFamily="34" charset="-120"/>
-              </a:rPr>
-              <a:t>factory.setMessageConverter(</a:t>
-            </a:r>
-            <a:endParaRPr lang="en-US" sz="1000" dirty="0"/>
-          </a:p>
-          <a:p>
-            <a:pPr marL="0" indent="0">
-              <a:buNone/>
-            </a:pPr>
-            <a:r>
-              <a:rPr lang="en-US" sz="1000" dirty="0">
-                <a:solidFill>
-                  <a:srgbClr val="E2E8F0"/>
-                </a:solidFill>
-                <a:latin typeface="Consolas" pitchFamily="34" charset="0"/>
-                <a:ea typeface="Consolas" pitchFamily="34" charset="-122"/>
-                <a:cs typeface="Consolas" pitchFamily="34" charset="-120"/>
-              </a:rPr>
-              <a:t>    jacksonJmsMessageConverter());</a:t>
-            </a:r>
-            <a:endParaRPr lang="en-US" sz="1000" dirty="0"/>
-          </a:p>
-        </p:txBody>
-      </p:sp>
-      <p:sp>
-        <p:nvSpPr>
-          <p:cNvPr id="5" name="Shape 3"/>
-          <p:cNvSpPr/>
-          <p:nvPr/>
-        </p:nvSpPr>
-        <p:spPr>
-          <a:xfrm>
-            <a:off x="5943600" y="914400"/>
-            <a:ext cx="2834640" cy="960120"/>
-          </a:xfrm>
-          <a:prstGeom prst="rect">
-            <a:avLst/>
-          </a:prstGeom>
-          <a:solidFill>
-            <a:srgbClr val="FFFFFF"/>
-          </a:solidFill>
-          <a:ln/>
-          <a:effectLst>
-            <a:outerShdw blurRad="50800" dist="25400" dir="8100000" algn="bl" rotWithShape="0">
-              <a:srgbClr val="000000">
-                <a:alpha val="10000"/>
-              </a:srgbClr>
-            </a:outerShdw>
-          </a:effectLst>
-        </p:spPr>
-        <p:txBody>
-          <a:bodyPr/>
-          <a:lstStyle/>
-          <a:p>
-            <a:endParaRPr lang="de-DE"/>
-          </a:p>
-        </p:txBody>
-      </p:sp>
-      <p:sp>
-        <p:nvSpPr>
-          <p:cNvPr id="6" name="Shape 4"/>
-          <p:cNvSpPr/>
-          <p:nvPr/>
-        </p:nvSpPr>
-        <p:spPr>
-          <a:xfrm>
-            <a:off x="5943600" y="914400"/>
-            <a:ext cx="54864" cy="960120"/>
-          </a:xfrm>
-          <a:prstGeom prst="rect">
-            <a:avLst/>
-          </a:prstGeom>
-          <a:solidFill>
-            <a:srgbClr val="065A82"/>
-          </a:solidFill>
-          <a:ln/>
-        </p:spPr>
-        <p:txBody>
-          <a:bodyPr/>
-          <a:lstStyle/>
-          <a:p>
-            <a:endParaRPr lang="de-DE"/>
-          </a:p>
-        </p:txBody>
-      </p:sp>
-      <p:sp>
-        <p:nvSpPr>
-          <p:cNvPr id="7" name="Text 5"/>
-          <p:cNvSpPr/>
-          <p:nvPr/>
-        </p:nvSpPr>
-        <p:spPr>
-          <a:xfrm>
-            <a:off x="6172200" y="1005840"/>
-            <a:ext cx="2468880" cy="274320"/>
-          </a:xfrm>
-          <a:prstGeom prst="rect">
-            <a:avLst/>
-          </a:prstGeom>
-          <a:noFill/>
-          <a:ln/>
-        </p:spPr>
-        <p:txBody>
-          <a:bodyPr wrap="square" lIns="0" tIns="0" rIns="0" bIns="0" rtlCol="0" anchor="ctr"/>
-          <a:lstStyle/>
-          <a:p>
-            <a:pPr marL="0" indent="0">
-              <a:buNone/>
-            </a:pPr>
-            <a:r>
-              <a:rPr lang="en-US" sz="1200" b="1" dirty="0">
-                <a:solidFill>
-                  <a:srgbClr val="065A82"/>
-                </a:solidFill>
-                <a:latin typeface="Calibri" pitchFamily="34" charset="0"/>
-                <a:ea typeface="Calibri" pitchFamily="34" charset="-122"/>
-                <a:cs typeface="Calibri" pitchFamily="34" charset="-120"/>
-              </a:rPr>
-              <a:t>Listener 1: Neue Jobs</a:t>
-            </a:r>
-            <a:endParaRPr lang="en-US" sz="1200" dirty="0"/>
-          </a:p>
-        </p:txBody>
-      </p:sp>
-      <p:sp>
-        <p:nvSpPr>
-          <p:cNvPr id="8" name="Text 6"/>
-          <p:cNvSpPr/>
-          <p:nvPr/>
-        </p:nvSpPr>
-        <p:spPr>
-          <a:xfrm>
-            <a:off x="6172200" y="1325880"/>
-            <a:ext cx="2468880" cy="457200"/>
-          </a:xfrm>
-          <a:prstGeom prst="rect">
-            <a:avLst/>
-          </a:prstGeom>
-          <a:noFill/>
-          <a:ln/>
-        </p:spPr>
-        <p:txBody>
-          <a:bodyPr wrap="square" lIns="0" tIns="0" rIns="0" bIns="0" rtlCol="0" anchor="ctr"/>
-          <a:lstStyle/>
-          <a:p>
-            <a:pPr marL="0" indent="0">
-              <a:buNone/>
-            </a:pPr>
-            <a:r>
-              <a:rPr lang="en-US" sz="1050" dirty="0">
-                <a:solidFill>
-                  <a:srgbClr val="64748B"/>
-                </a:solidFill>
-                <a:latin typeface="Calibri" pitchFamily="34" charset="0"/>
-                <a:ea typeface="Calibri" pitchFamily="34" charset="-122"/>
-                <a:cs typeface="Calibri" pitchFamily="34" charset="-120"/>
-              </a:rPr>
-              <a:t>Hört auf Topic dispo.jobs.new</a:t>
-            </a:r>
-            <a:endParaRPr lang="en-US" sz="1050" dirty="0"/>
-          </a:p>
-          <a:p>
-            <a:pPr marL="0" indent="0">
-              <a:buNone/>
-            </a:pPr>
-            <a:r>
-              <a:rPr lang="en-US" sz="1050" dirty="0">
-                <a:solidFill>
-                  <a:srgbClr val="64748B"/>
-                </a:solidFill>
-                <a:latin typeface="Calibri" pitchFamily="34" charset="0"/>
-                <a:ea typeface="Calibri" pitchFamily="34" charset="-122"/>
-                <a:cs typeface="Calibri" pitchFamily="34" charset="-120"/>
-              </a:rPr>
-              <a:t>Alle Clients empfangen eine Kopie</a:t>
-            </a:r>
-            <a:endParaRPr lang="en-US" sz="1050" dirty="0"/>
-          </a:p>
-        </p:txBody>
-      </p:sp>
-      <p:sp>
-        <p:nvSpPr>
-          <p:cNvPr id="9" name="Shape 7"/>
-          <p:cNvSpPr/>
-          <p:nvPr/>
-        </p:nvSpPr>
-        <p:spPr>
-          <a:xfrm>
-            <a:off x="5943600" y="2103120"/>
-            <a:ext cx="2834640" cy="960120"/>
-          </a:xfrm>
-          <a:prstGeom prst="rect">
-            <a:avLst/>
-          </a:prstGeom>
-          <a:solidFill>
-            <a:srgbClr val="FFFFFF"/>
-          </a:solidFill>
-          <a:ln/>
-          <a:effectLst>
-            <a:outerShdw blurRad="50800" dist="25400" dir="8100000" algn="bl" rotWithShape="0">
-              <a:srgbClr val="000000">
-                <a:alpha val="10000"/>
-              </a:srgbClr>
-            </a:outerShdw>
-          </a:effectLst>
-        </p:spPr>
-        <p:txBody>
-          <a:bodyPr/>
-          <a:lstStyle/>
-          <a:p>
-            <a:endParaRPr lang="de-DE"/>
-          </a:p>
-        </p:txBody>
-      </p:sp>
-      <p:sp>
-        <p:nvSpPr>
-          <p:cNvPr id="10" name="Shape 8"/>
-          <p:cNvSpPr/>
-          <p:nvPr/>
-        </p:nvSpPr>
-        <p:spPr>
-          <a:xfrm>
-            <a:off x="5943600" y="2103120"/>
-            <a:ext cx="54864" cy="960120"/>
-          </a:xfrm>
-          <a:prstGeom prst="rect">
-            <a:avLst/>
-          </a:prstGeom>
-          <a:solidFill>
-            <a:srgbClr val="1C7293"/>
-          </a:solidFill>
-          <a:ln/>
-        </p:spPr>
-        <p:txBody>
-          <a:bodyPr/>
-          <a:lstStyle/>
-          <a:p>
-            <a:endParaRPr lang="de-DE"/>
-          </a:p>
-        </p:txBody>
-      </p:sp>
-      <p:sp>
-        <p:nvSpPr>
-          <p:cNvPr id="11" name="Text 9"/>
-          <p:cNvSpPr/>
-          <p:nvPr/>
-        </p:nvSpPr>
-        <p:spPr>
-          <a:xfrm>
-            <a:off x="6172200" y="2194560"/>
-            <a:ext cx="2468880" cy="274320"/>
-          </a:xfrm>
-          <a:prstGeom prst="rect">
-            <a:avLst/>
-          </a:prstGeom>
-          <a:noFill/>
-          <a:ln/>
-        </p:spPr>
-        <p:txBody>
-          <a:bodyPr wrap="square" lIns="0" tIns="0" rIns="0" bIns="0" rtlCol="0" anchor="ctr"/>
-          <a:lstStyle/>
-          <a:p>
-            <a:pPr marL="0" indent="0">
-              <a:buNone/>
-            </a:pPr>
-            <a:r>
-              <a:rPr lang="en-US" sz="1200" b="1" dirty="0">
-                <a:solidFill>
-                  <a:srgbClr val="1C7293"/>
-                </a:solidFill>
-                <a:latin typeface="Calibri" pitchFamily="34" charset="0"/>
-                <a:ea typeface="Calibri" pitchFamily="34" charset="-122"/>
-                <a:cs typeface="Calibri" pitchFamily="34" charset="-120"/>
-              </a:rPr>
-              <a:t>Listener 2: Zuweisungen</a:t>
-            </a:r>
-            <a:endParaRPr lang="en-US" sz="1200" dirty="0"/>
-          </a:p>
-        </p:txBody>
-      </p:sp>
-      <p:sp>
-        <p:nvSpPr>
-          <p:cNvPr id="12" name="Text 10"/>
-          <p:cNvSpPr/>
-          <p:nvPr/>
-        </p:nvSpPr>
-        <p:spPr>
-          <a:xfrm>
-            <a:off x="6172200" y="2514600"/>
-            <a:ext cx="2468880" cy="457200"/>
-          </a:xfrm>
-          <a:prstGeom prst="rect">
-            <a:avLst/>
-          </a:prstGeom>
-          <a:noFill/>
-          <a:ln/>
-        </p:spPr>
-        <p:txBody>
-          <a:bodyPr wrap="square" lIns="0" tIns="0" rIns="0" bIns="0" rtlCol="0" anchor="ctr"/>
-          <a:lstStyle/>
-          <a:p>
-            <a:pPr marL="0" indent="0">
-              <a:buNone/>
-            </a:pPr>
-            <a:r>
-              <a:rPr lang="en-US" sz="1050" dirty="0">
-                <a:solidFill>
-                  <a:srgbClr val="64748B"/>
-                </a:solidFill>
-                <a:latin typeface="Calibri" pitchFamily="34" charset="0"/>
-                <a:ea typeface="Calibri" pitchFamily="34" charset="-122"/>
-                <a:cs typeface="Calibri" pitchFamily="34" charset="-120"/>
-              </a:rPr>
-              <a:t>Hört auf Topic dispo.jobs.assignments</a:t>
-            </a:r>
-            <a:endParaRPr lang="en-US" sz="1050" dirty="0"/>
-          </a:p>
-          <a:p>
-            <a:pPr marL="0" indent="0">
-              <a:buNone/>
-            </a:pPr>
-            <a:r>
-              <a:rPr lang="en-US" sz="1050" dirty="0">
-                <a:solidFill>
-                  <a:srgbClr val="64748B"/>
-                </a:solidFill>
-                <a:latin typeface="Calibri" pitchFamily="34" charset="0"/>
-                <a:ea typeface="Calibri" pitchFamily="34" charset="-122"/>
-                <a:cs typeface="Calibri" pitchFamily="34" charset="-120"/>
-              </a:rPr>
-              <a:t>Job wird aus offener Liste entfernt</a:t>
-            </a:r>
-            <a:endParaRPr lang="en-US" sz="1050" dirty="0"/>
-          </a:p>
-        </p:txBody>
-      </p:sp>
-      <p:sp>
-        <p:nvSpPr>
-          <p:cNvPr id="13" name="Shape 11"/>
-          <p:cNvSpPr/>
-          <p:nvPr/>
-        </p:nvSpPr>
-        <p:spPr>
-          <a:xfrm>
-            <a:off x="5943600" y="3291840"/>
-            <a:ext cx="2834640" cy="960120"/>
-          </a:xfrm>
-          <a:prstGeom prst="rect">
-            <a:avLst/>
-          </a:prstGeom>
-          <a:solidFill>
-            <a:srgbClr val="FFFFFF"/>
-          </a:solidFill>
-          <a:ln/>
-          <a:effectLst>
-            <a:outerShdw blurRad="50800" dist="25400" dir="8100000" algn="bl" rotWithShape="0">
-              <a:srgbClr val="000000">
-                <a:alpha val="10000"/>
-              </a:srgbClr>
-            </a:outerShdw>
-          </a:effectLst>
-        </p:spPr>
-        <p:txBody>
-          <a:bodyPr/>
-          <a:lstStyle/>
-          <a:p>
-            <a:endParaRPr lang="de-DE"/>
-          </a:p>
-        </p:txBody>
-      </p:sp>
-      <p:sp>
-        <p:nvSpPr>
-          <p:cNvPr id="14" name="Shape 12"/>
-          <p:cNvSpPr/>
-          <p:nvPr/>
-        </p:nvSpPr>
-        <p:spPr>
-          <a:xfrm>
-            <a:off x="5943600" y="3291840"/>
-            <a:ext cx="54864" cy="960120"/>
-          </a:xfrm>
-          <a:prstGeom prst="rect">
-            <a:avLst/>
-          </a:prstGeom>
-          <a:solidFill>
-            <a:srgbClr val="F59E0B"/>
-          </a:solidFill>
-          <a:ln/>
-        </p:spPr>
-        <p:txBody>
-          <a:bodyPr/>
-          <a:lstStyle/>
-          <a:p>
-            <a:endParaRPr lang="de-DE"/>
-          </a:p>
-        </p:txBody>
-      </p:sp>
-      <p:sp>
-        <p:nvSpPr>
-          <p:cNvPr id="15" name="Text 13"/>
-          <p:cNvSpPr/>
-          <p:nvPr/>
-        </p:nvSpPr>
-        <p:spPr>
-          <a:xfrm>
-            <a:off x="6172200" y="3383280"/>
-            <a:ext cx="2468880" cy="274320"/>
-          </a:xfrm>
-          <a:prstGeom prst="rect">
-            <a:avLst/>
-          </a:prstGeom>
-          <a:noFill/>
-          <a:ln/>
-        </p:spPr>
-        <p:txBody>
-          <a:bodyPr wrap="square" lIns="0" tIns="0" rIns="0" bIns="0" rtlCol="0" anchor="ctr"/>
-          <a:lstStyle/>
-          <a:p>
-            <a:pPr marL="0" indent="0">
-              <a:buNone/>
-            </a:pPr>
-            <a:r>
-              <a:rPr lang="en-US" sz="1200" b="1" dirty="0">
-                <a:solidFill>
-                  <a:srgbClr val="F59E0B"/>
-                </a:solidFill>
-                <a:latin typeface="Calibri" pitchFamily="34" charset="0"/>
-                <a:ea typeface="Calibri" pitchFamily="34" charset="-122"/>
-                <a:cs typeface="Calibri" pitchFamily="34" charset="-120"/>
-              </a:rPr>
-              <a:t>setPubSubDomain(true)</a:t>
-            </a:r>
-            <a:endParaRPr lang="en-US" sz="1200" dirty="0"/>
-          </a:p>
-        </p:txBody>
-      </p:sp>
-      <p:sp>
-        <p:nvSpPr>
-          <p:cNvPr id="16" name="Text 14"/>
-          <p:cNvSpPr/>
-          <p:nvPr/>
-        </p:nvSpPr>
-        <p:spPr>
-          <a:xfrm>
-            <a:off x="6172200" y="3703320"/>
-            <a:ext cx="2468880" cy="457200"/>
-          </a:xfrm>
-          <a:prstGeom prst="rect">
-            <a:avLst/>
-          </a:prstGeom>
-          <a:noFill/>
-          <a:ln/>
-        </p:spPr>
-        <p:txBody>
-          <a:bodyPr wrap="square" lIns="0" tIns="0" rIns="0" bIns="0" rtlCol="0" anchor="ctr"/>
-          <a:lstStyle/>
-          <a:p>
-            <a:pPr marL="0" indent="0">
-              <a:buNone/>
-            </a:pPr>
-            <a:r>
-              <a:rPr lang="en-US" sz="1050" dirty="0">
-                <a:solidFill>
-                  <a:srgbClr val="64748B"/>
-                </a:solidFill>
-                <a:latin typeface="Calibri" pitchFamily="34" charset="0"/>
-                <a:ea typeface="Calibri" pitchFamily="34" charset="-122"/>
-                <a:cs typeface="Calibri" pitchFamily="34" charset="-120"/>
-              </a:rPr>
-              <a:t>Konfiguriert Factory für Topics</a:t>
-            </a:r>
-            <a:endParaRPr lang="en-US" sz="1050" dirty="0"/>
-          </a:p>
-          <a:p>
-            <a:pPr marL="0" indent="0">
-              <a:buNone/>
-            </a:pPr>
-            <a:r>
-              <a:rPr lang="en-US" sz="1050" dirty="0">
-                <a:solidFill>
-                  <a:srgbClr val="64748B"/>
-                </a:solidFill>
-                <a:latin typeface="Calibri" pitchFamily="34" charset="0"/>
-                <a:ea typeface="Calibri" pitchFamily="34" charset="-122"/>
-                <a:cs typeface="Calibri" pitchFamily="34" charset="-120"/>
-              </a:rPr>
-              <a:t>Ohne diese Zeile: keine Nachrichten!</a:t>
-            </a:r>
-            <a:endParaRPr lang="en-US" sz="1050" dirty="0"/>
           </a:p>
         </p:txBody>
       </p:sp>
@@ -14417,6 +14367,15 @@
 </file>
 
 <file path=customXml/item1.xml><?xml version="1.0" encoding="utf-8"?>
+<?mso-contentType ?>
+<FormTemplates xmlns="http://schemas.microsoft.com/sharepoint/v3/contenttype/forms">
+  <Display>DocumentLibraryForm</Display>
+  <Edit>DocumentLibraryForm</Edit>
+  <New>DocumentLibraryForm</New>
+</FormTemplates>
+</file>
+
+<file path=customXml/item2.xml><?xml version="1.0" encoding="utf-8"?>
 <p:properties xmlns:p="http://schemas.microsoft.com/office/2006/metadata/properties" xmlns:xsi="http://www.w3.org/2001/XMLSchema-instance" xmlns:pc="http://schemas.microsoft.com/office/infopath/2007/PartnerControls">
   <documentManagement>
     <TaxCatchAll xmlns="d684224b-3301-40f1-9cd0-5d09186ee5bf" xsi:nil="true"/>
@@ -14425,15 +14384,6 @@
     </lcf76f155ced4ddcb4097134ff3c332f>
   </documentManagement>
 </p:properties>
-</file>
-
-<file path=customXml/item2.xml><?xml version="1.0" encoding="utf-8"?>
-<?mso-contentType ?>
-<FormTemplates xmlns="http://schemas.microsoft.com/sharepoint/v3/contenttype/forms">
-  <Display>DocumentLibraryForm</Display>
-  <Edit>DocumentLibraryForm</Edit>
-  <New>DocumentLibraryForm</New>
-</FormTemplates>
 </file>
 
 <file path=customXml/item3.xml><?xml version="1.0" encoding="utf-8"?>
@@ -14632,6 +14582,14 @@
 </file>
 
 <file path=customXml/itemProps1.xml><?xml version="1.0" encoding="utf-8"?>
+<ds:datastoreItem xmlns:ds="http://schemas.openxmlformats.org/officeDocument/2006/customXml" ds:itemID="{24BDABA3-01A8-4DEC-9162-F96A2E8147B6}">
+  <ds:schemaRefs>
+    <ds:schemaRef ds:uri="http://schemas.microsoft.com/sharepoint/v3/contenttype/forms"/>
+  </ds:schemaRefs>
+</ds:datastoreItem>
+</file>
+
+<file path=customXml/itemProps2.xml><?xml version="1.0" encoding="utf-8"?>
 <ds:datastoreItem xmlns:ds="http://schemas.openxmlformats.org/officeDocument/2006/customXml" ds:itemID="{887570CB-D218-42A6-875A-CD9D75EA02C3}">
   <ds:schemaRefs>
     <ds:schemaRef ds:uri="http://www.w3.org/XML/1998/namespace"/>
@@ -14644,14 +14602,6 @@
     <ds:schemaRef ds:uri="d684224b-3301-40f1-9cd0-5d09186ee5bf"/>
     <ds:schemaRef ds:uri="933de62b-0236-4f90-9d7a-f3a8f1678523"/>
     <ds:schemaRef ds:uri="http://purl.org/dc/dcmitype/"/>
-  </ds:schemaRefs>
-</ds:datastoreItem>
-</file>
-
-<file path=customXml/itemProps2.xml><?xml version="1.0" encoding="utf-8"?>
-<ds:datastoreItem xmlns:ds="http://schemas.openxmlformats.org/officeDocument/2006/customXml" ds:itemID="{24BDABA3-01A8-4DEC-9162-F96A2E8147B6}">
-  <ds:schemaRefs>
-    <ds:schemaRef ds:uri="http://schemas.microsoft.com/sharepoint/v3/contenttype/forms"/>
   </ds:schemaRefs>
 </ds:datastoreItem>
 </file>
